--- a/Documents/Trip of memories SYSTEM Flow Chart.pptx
+++ b/Documents/Trip of memories SYSTEM Flow Chart.pptx
@@ -8,6 +8,9 @@
     <p:sldId id="256" r:id="rId2"/>
     <p:sldId id="257" r:id="rId3"/>
     <p:sldId id="258" r:id="rId4"/>
+    <p:sldId id="259" r:id="rId5"/>
+    <p:sldId id="260" r:id="rId6"/>
+    <p:sldId id="261" r:id="rId7"/>
   </p:sldIdLst>
   <p:sldSz cx="12192000" cy="6858000"/>
   <p:notesSz cx="6858000" cy="9144000"/>
@@ -106,6 +109,11 @@
       </a:defRPr>
     </a:lvl9pPr>
   </p:defaultTextStyle>
+  <p:extLst>
+    <p:ext uri="{EFAFB233-063F-42B5-8137-9DF3F51BA10A}">
+      <p15:sldGuideLst xmlns:p15="http://schemas.microsoft.com/office/powerpoint/2012/main"/>
+    </p:ext>
+  </p:extLst>
 </p:presentation>
 </file>
 
@@ -256,7 +264,7 @@
           <a:p>
             <a:fld id="{8512E709-CF1F-47C0-9DB3-3BD313B99AA9}" type="datetimeFigureOut">
               <a:rPr lang="ko-KR" altLang="en-US" smtClean="0"/>
-              <a:t>2026-03-19</a:t>
+              <a:t>2026-03-20</a:t>
             </a:fld>
             <a:endParaRPr lang="ko-KR" altLang="en-US"/>
           </a:p>
@@ -454,7 +462,7 @@
           <a:p>
             <a:fld id="{8512E709-CF1F-47C0-9DB3-3BD313B99AA9}" type="datetimeFigureOut">
               <a:rPr lang="ko-KR" altLang="en-US" smtClean="0"/>
-              <a:t>2026-03-19</a:t>
+              <a:t>2026-03-20</a:t>
             </a:fld>
             <a:endParaRPr lang="ko-KR" altLang="en-US"/>
           </a:p>
@@ -662,7 +670,7 @@
           <a:p>
             <a:fld id="{8512E709-CF1F-47C0-9DB3-3BD313B99AA9}" type="datetimeFigureOut">
               <a:rPr lang="ko-KR" altLang="en-US" smtClean="0"/>
-              <a:t>2026-03-19</a:t>
+              <a:t>2026-03-20</a:t>
             </a:fld>
             <a:endParaRPr lang="ko-KR" altLang="en-US"/>
           </a:p>
@@ -860,7 +868,7 @@
           <a:p>
             <a:fld id="{8512E709-CF1F-47C0-9DB3-3BD313B99AA9}" type="datetimeFigureOut">
               <a:rPr lang="ko-KR" altLang="en-US" smtClean="0"/>
-              <a:t>2026-03-19</a:t>
+              <a:t>2026-03-20</a:t>
             </a:fld>
             <a:endParaRPr lang="ko-KR" altLang="en-US"/>
           </a:p>
@@ -1135,7 +1143,7 @@
           <a:p>
             <a:fld id="{8512E709-CF1F-47C0-9DB3-3BD313B99AA9}" type="datetimeFigureOut">
               <a:rPr lang="ko-KR" altLang="en-US" smtClean="0"/>
-              <a:t>2026-03-19</a:t>
+              <a:t>2026-03-20</a:t>
             </a:fld>
             <a:endParaRPr lang="ko-KR" altLang="en-US"/>
           </a:p>
@@ -1400,7 +1408,7 @@
           <a:p>
             <a:fld id="{8512E709-CF1F-47C0-9DB3-3BD313B99AA9}" type="datetimeFigureOut">
               <a:rPr lang="ko-KR" altLang="en-US" smtClean="0"/>
-              <a:t>2026-03-19</a:t>
+              <a:t>2026-03-20</a:t>
             </a:fld>
             <a:endParaRPr lang="ko-KR" altLang="en-US"/>
           </a:p>
@@ -1812,7 +1820,7 @@
           <a:p>
             <a:fld id="{8512E709-CF1F-47C0-9DB3-3BD313B99AA9}" type="datetimeFigureOut">
               <a:rPr lang="ko-KR" altLang="en-US" smtClean="0"/>
-              <a:t>2026-03-19</a:t>
+              <a:t>2026-03-20</a:t>
             </a:fld>
             <a:endParaRPr lang="ko-KR" altLang="en-US"/>
           </a:p>
@@ -1953,7 +1961,7 @@
           <a:p>
             <a:fld id="{8512E709-CF1F-47C0-9DB3-3BD313B99AA9}" type="datetimeFigureOut">
               <a:rPr lang="ko-KR" altLang="en-US" smtClean="0"/>
-              <a:t>2026-03-19</a:t>
+              <a:t>2026-03-20</a:t>
             </a:fld>
             <a:endParaRPr lang="ko-KR" altLang="en-US"/>
           </a:p>
@@ -2066,7 +2074,7 @@
           <a:p>
             <a:fld id="{8512E709-CF1F-47C0-9DB3-3BD313B99AA9}" type="datetimeFigureOut">
               <a:rPr lang="ko-KR" altLang="en-US" smtClean="0"/>
-              <a:t>2026-03-19</a:t>
+              <a:t>2026-03-20</a:t>
             </a:fld>
             <a:endParaRPr lang="ko-KR" altLang="en-US"/>
           </a:p>
@@ -2377,7 +2385,7 @@
           <a:p>
             <a:fld id="{8512E709-CF1F-47C0-9DB3-3BD313B99AA9}" type="datetimeFigureOut">
               <a:rPr lang="ko-KR" altLang="en-US" smtClean="0"/>
-              <a:t>2026-03-19</a:t>
+              <a:t>2026-03-20</a:t>
             </a:fld>
             <a:endParaRPr lang="ko-KR" altLang="en-US"/>
           </a:p>
@@ -2665,7 +2673,7 @@
           <a:p>
             <a:fld id="{8512E709-CF1F-47C0-9DB3-3BD313B99AA9}" type="datetimeFigureOut">
               <a:rPr lang="ko-KR" altLang="en-US" smtClean="0"/>
-              <a:t>2026-03-19</a:t>
+              <a:t>2026-03-20</a:t>
             </a:fld>
             <a:endParaRPr lang="ko-KR" altLang="en-US"/>
           </a:p>
@@ -2906,7 +2914,7 @@
           <a:p>
             <a:fld id="{8512E709-CF1F-47C0-9DB3-3BD313B99AA9}" type="datetimeFigureOut">
               <a:rPr lang="ko-KR" altLang="en-US" smtClean="0"/>
-              <a:t>2026-03-19</a:t>
+              <a:t>2026-03-20</a:t>
             </a:fld>
             <a:endParaRPr lang="ko-KR" altLang="en-US"/>
           </a:p>
@@ -3418,7 +3426,7 @@
         </p:nvSpPr>
         <p:spPr>
           <a:xfrm>
-            <a:off x="1422401" y="1376214"/>
+            <a:off x="1431639" y="544942"/>
             <a:ext cx="2161308" cy="738909"/>
           </a:xfrm>
           <a:prstGeom prst="rect">
@@ -3480,8 +3488,8 @@
         </p:nvCxnSpPr>
         <p:spPr>
           <a:xfrm>
-            <a:off x="2503055" y="2115123"/>
-            <a:ext cx="0" cy="738909"/>
+            <a:off x="2512293" y="1283851"/>
+            <a:ext cx="0" cy="420254"/>
           </a:xfrm>
           <a:prstGeom prst="straightConnector1">
             <a:avLst/>
@@ -3522,7 +3530,7 @@
         </p:nvSpPr>
         <p:spPr>
           <a:xfrm>
-            <a:off x="1422401" y="2854032"/>
+            <a:off x="1413165" y="2854032"/>
             <a:ext cx="2161308" cy="738909"/>
           </a:xfrm>
           <a:prstGeom prst="rect">
@@ -3838,18 +3846,20 @@
             </a:extLst>
           </p:cNvPr>
           <p:cNvCxnSpPr>
-            <a:stCxn id="5" idx="3"/>
-            <a:endCxn id="15" idx="0"/>
+            <a:cxnSpLocks/>
+            <a:stCxn id="4" idx="3"/>
           </p:cNvCxnSpPr>
           <p:nvPr/>
         </p:nvCxnSpPr>
         <p:spPr>
           <a:xfrm>
-            <a:off x="3583709" y="1745669"/>
-            <a:ext cx="2475345" cy="2586181"/>
-          </a:xfrm>
-          <a:prstGeom prst="bentConnector2">
-            <a:avLst/>
+            <a:off x="3652984" y="1997357"/>
+            <a:ext cx="2424544" cy="2371435"/>
+          </a:xfrm>
+          <a:prstGeom prst="bentConnector3">
+            <a:avLst>
+              <a:gd name="adj1" fmla="val 99524"/>
+            </a:avLst>
           </a:prstGeom>
           <a:ln>
             <a:tailEnd type="triangle"/>
@@ -3969,6 +3979,639 @@
                 </a:solidFill>
               </a:rPr>
               <a:t>스테이지 진행</a:t>
+            </a:r>
+          </a:p>
+        </p:txBody>
+      </p:sp>
+      <p:sp>
+        <p:nvSpPr>
+          <p:cNvPr id="4" name="다이아몬드 3">
+            <a:extLst>
+              <a:ext uri="{FF2B5EF4-FFF2-40B4-BE49-F238E27FC236}">
+                <a16:creationId xmlns:a16="http://schemas.microsoft.com/office/drawing/2014/main" id="{10579DCA-557A-C7F6-7A72-CF574CFF9C66}"/>
+              </a:ext>
+            </a:extLst>
+          </p:cNvPr>
+          <p:cNvSpPr/>
+          <p:nvPr/>
+        </p:nvSpPr>
+        <p:spPr>
+          <a:xfrm>
+            <a:off x="1334659" y="1715646"/>
+            <a:ext cx="2318325" cy="563422"/>
+          </a:xfrm>
+          <a:prstGeom prst="diamond">
+            <a:avLst/>
+          </a:prstGeom>
+          <a:noFill/>
+          <a:ln>
+            <a:solidFill>
+              <a:schemeClr val="tx1"/>
+            </a:solidFill>
+          </a:ln>
+        </p:spPr>
+        <p:style>
+          <a:lnRef idx="2">
+            <a:schemeClr val="accent1">
+              <a:shade val="15000"/>
+            </a:schemeClr>
+          </a:lnRef>
+          <a:fillRef idx="1">
+            <a:schemeClr val="accent1"/>
+          </a:fillRef>
+          <a:effectRef idx="0">
+            <a:schemeClr val="accent1"/>
+          </a:effectRef>
+          <a:fontRef idx="minor">
+            <a:schemeClr val="lt1"/>
+          </a:fontRef>
+        </p:style>
+        <p:txBody>
+          <a:bodyPr rtlCol="0" anchor="ctr"/>
+          <a:lstStyle/>
+          <a:p>
+            <a:pPr algn="ctr"/>
+            <a:r>
+              <a:rPr lang="ko-KR" altLang="en-US">
+                <a:solidFill>
+                  <a:sysClr val="windowText" lastClr="000000"/>
+                </a:solidFill>
+              </a:rPr>
+              <a:t>이어하기</a:t>
+            </a:r>
+          </a:p>
+        </p:txBody>
+      </p:sp>
+      <p:cxnSp>
+        <p:nvCxnSpPr>
+          <p:cNvPr id="16" name="직선 화살표 연결선 15">
+            <a:extLst>
+              <a:ext uri="{FF2B5EF4-FFF2-40B4-BE49-F238E27FC236}">
+                <a16:creationId xmlns:a16="http://schemas.microsoft.com/office/drawing/2014/main" id="{39565D64-ADE7-E886-2977-CF35156BDA10}"/>
+              </a:ext>
+            </a:extLst>
+          </p:cNvPr>
+          <p:cNvCxnSpPr>
+            <a:cxnSpLocks/>
+            <a:stCxn id="4" idx="2"/>
+            <a:endCxn id="9" idx="0"/>
+          </p:cNvCxnSpPr>
+          <p:nvPr/>
+        </p:nvCxnSpPr>
+        <p:spPr>
+          <a:xfrm flipH="1">
+            <a:off x="2493819" y="2279068"/>
+            <a:ext cx="3" cy="574964"/>
+          </a:xfrm>
+          <a:prstGeom prst="straightConnector1">
+            <a:avLst/>
+          </a:prstGeom>
+          <a:ln>
+            <a:solidFill>
+              <a:schemeClr val="tx1"/>
+            </a:solidFill>
+            <a:tailEnd type="triangle"/>
+          </a:ln>
+        </p:spPr>
+        <p:style>
+          <a:lnRef idx="1">
+            <a:schemeClr val="accent1"/>
+          </a:lnRef>
+          <a:fillRef idx="0">
+            <a:schemeClr val="accent1"/>
+          </a:fillRef>
+          <a:effectRef idx="0">
+            <a:schemeClr val="accent1"/>
+          </a:effectRef>
+          <a:fontRef idx="minor">
+            <a:schemeClr val="tx1"/>
+          </a:fontRef>
+        </p:style>
+      </p:cxnSp>
+      <p:sp>
+        <p:nvSpPr>
+          <p:cNvPr id="23" name="직사각형 22">
+            <a:extLst>
+              <a:ext uri="{FF2B5EF4-FFF2-40B4-BE49-F238E27FC236}">
+                <a16:creationId xmlns:a16="http://schemas.microsoft.com/office/drawing/2014/main" id="{4136ED2F-6CDF-D217-E22E-ADCF9D750661}"/>
+              </a:ext>
+            </a:extLst>
+          </p:cNvPr>
+          <p:cNvSpPr/>
+          <p:nvPr/>
+        </p:nvSpPr>
+        <p:spPr>
+          <a:xfrm>
+            <a:off x="36948" y="2197095"/>
+            <a:ext cx="2161308" cy="738909"/>
+          </a:xfrm>
+          <a:prstGeom prst="rect">
+            <a:avLst/>
+          </a:prstGeom>
+          <a:noFill/>
+          <a:ln>
+            <a:noFill/>
+          </a:ln>
+        </p:spPr>
+        <p:style>
+          <a:lnRef idx="2">
+            <a:schemeClr val="accent1">
+              <a:shade val="15000"/>
+            </a:schemeClr>
+          </a:lnRef>
+          <a:fillRef idx="1">
+            <a:schemeClr val="accent1"/>
+          </a:fillRef>
+          <a:effectRef idx="0">
+            <a:schemeClr val="accent1"/>
+          </a:effectRef>
+          <a:fontRef idx="minor">
+            <a:schemeClr val="lt1"/>
+          </a:fontRef>
+        </p:style>
+        <p:txBody>
+          <a:bodyPr rtlCol="0" anchor="ctr"/>
+          <a:lstStyle/>
+          <a:p>
+            <a:pPr algn="ctr"/>
+            <a:r>
+              <a:rPr lang="ko-KR" altLang="en-US" dirty="0">
+                <a:solidFill>
+                  <a:sysClr val="windowText" lastClr="000000"/>
+                </a:solidFill>
+              </a:rPr>
+              <a:t>아니요</a:t>
+            </a:r>
+            <a:r>
+              <a:rPr lang="en-US" altLang="ko-KR" dirty="0">
+                <a:solidFill>
+                  <a:sysClr val="windowText" lastClr="000000"/>
+                </a:solidFill>
+              </a:rPr>
+              <a:t>, </a:t>
+            </a:r>
+            <a:r>
+              <a:rPr lang="ko-KR" altLang="en-US" dirty="0">
+                <a:solidFill>
+                  <a:sysClr val="windowText" lastClr="000000"/>
+                </a:solidFill>
+              </a:rPr>
+              <a:t>또는 저장 데이터가 없음</a:t>
+            </a:r>
+          </a:p>
+        </p:txBody>
+      </p:sp>
+      <p:sp>
+        <p:nvSpPr>
+          <p:cNvPr id="24" name="직사각형 23">
+            <a:extLst>
+              <a:ext uri="{FF2B5EF4-FFF2-40B4-BE49-F238E27FC236}">
+                <a16:creationId xmlns:a16="http://schemas.microsoft.com/office/drawing/2014/main" id="{726220FE-C80D-D91B-D664-B8298A82CD9D}"/>
+              </a:ext>
+            </a:extLst>
+          </p:cNvPr>
+          <p:cNvSpPr/>
+          <p:nvPr/>
+        </p:nvSpPr>
+        <p:spPr>
+          <a:xfrm>
+            <a:off x="4481944" y="1258448"/>
+            <a:ext cx="798950" cy="738909"/>
+          </a:xfrm>
+          <a:prstGeom prst="rect">
+            <a:avLst/>
+          </a:prstGeom>
+          <a:noFill/>
+          <a:ln>
+            <a:noFill/>
+          </a:ln>
+        </p:spPr>
+        <p:style>
+          <a:lnRef idx="2">
+            <a:schemeClr val="accent1">
+              <a:shade val="15000"/>
+            </a:schemeClr>
+          </a:lnRef>
+          <a:fillRef idx="1">
+            <a:schemeClr val="accent1"/>
+          </a:fillRef>
+          <a:effectRef idx="0">
+            <a:schemeClr val="accent1"/>
+          </a:effectRef>
+          <a:fontRef idx="minor">
+            <a:schemeClr val="lt1"/>
+          </a:fontRef>
+        </p:style>
+        <p:txBody>
+          <a:bodyPr rtlCol="0" anchor="ctr"/>
+          <a:lstStyle/>
+          <a:p>
+            <a:pPr algn="ctr"/>
+            <a:r>
+              <a:rPr lang="ko-KR" altLang="en-US" dirty="0">
+                <a:solidFill>
+                  <a:sysClr val="windowText" lastClr="000000"/>
+                </a:solidFill>
+              </a:rPr>
+              <a:t>예</a:t>
+            </a:r>
+          </a:p>
+        </p:txBody>
+      </p:sp>
+      <p:cxnSp>
+        <p:nvCxnSpPr>
+          <p:cNvPr id="25" name="직선 화살표 연결선 24">
+            <a:extLst>
+              <a:ext uri="{FF2B5EF4-FFF2-40B4-BE49-F238E27FC236}">
+                <a16:creationId xmlns:a16="http://schemas.microsoft.com/office/drawing/2014/main" id="{8DD62C6C-2751-3767-83B0-3EF7ABB60EF1}"/>
+              </a:ext>
+            </a:extLst>
+          </p:cNvPr>
+          <p:cNvCxnSpPr>
+            <a:cxnSpLocks/>
+          </p:cNvCxnSpPr>
+          <p:nvPr/>
+        </p:nvCxnSpPr>
+        <p:spPr>
+          <a:xfrm flipH="1">
+            <a:off x="7398326" y="4955303"/>
+            <a:ext cx="1136073" cy="0"/>
+          </a:xfrm>
+          <a:prstGeom prst="straightConnector1">
+            <a:avLst/>
+          </a:prstGeom>
+          <a:ln>
+            <a:solidFill>
+              <a:schemeClr val="tx1"/>
+            </a:solidFill>
+            <a:tailEnd type="triangle"/>
+          </a:ln>
+        </p:spPr>
+        <p:style>
+          <a:lnRef idx="1">
+            <a:schemeClr val="accent1"/>
+          </a:lnRef>
+          <a:fillRef idx="0">
+            <a:schemeClr val="accent1"/>
+          </a:fillRef>
+          <a:effectRef idx="0">
+            <a:schemeClr val="accent1"/>
+          </a:effectRef>
+          <a:fontRef idx="minor">
+            <a:schemeClr val="tx1"/>
+          </a:fontRef>
+        </p:style>
+      </p:cxnSp>
+      <p:sp>
+        <p:nvSpPr>
+          <p:cNvPr id="29" name="직사각형 28">
+            <a:extLst>
+              <a:ext uri="{FF2B5EF4-FFF2-40B4-BE49-F238E27FC236}">
+                <a16:creationId xmlns:a16="http://schemas.microsoft.com/office/drawing/2014/main" id="{B0924CE6-FF7D-0570-4D61-8C83DC7EE9F3}"/>
+              </a:ext>
+            </a:extLst>
+          </p:cNvPr>
+          <p:cNvSpPr/>
+          <p:nvPr/>
+        </p:nvSpPr>
+        <p:spPr>
+          <a:xfrm>
+            <a:off x="6560124" y="5209302"/>
+            <a:ext cx="2678544" cy="738909"/>
+          </a:xfrm>
+          <a:prstGeom prst="rect">
+            <a:avLst/>
+          </a:prstGeom>
+          <a:noFill/>
+          <a:ln>
+            <a:noFill/>
+          </a:ln>
+        </p:spPr>
+        <p:style>
+          <a:lnRef idx="2">
+            <a:schemeClr val="accent1">
+              <a:shade val="15000"/>
+            </a:schemeClr>
+          </a:lnRef>
+          <a:fillRef idx="1">
+            <a:schemeClr val="accent1"/>
+          </a:fillRef>
+          <a:effectRef idx="0">
+            <a:schemeClr val="accent1"/>
+          </a:effectRef>
+          <a:fontRef idx="minor">
+            <a:schemeClr val="lt1"/>
+          </a:fontRef>
+        </p:style>
+        <p:txBody>
+          <a:bodyPr rtlCol="0" anchor="ctr"/>
+          <a:lstStyle/>
+          <a:p>
+            <a:pPr algn="ctr"/>
+            <a:r>
+              <a:rPr lang="ko-KR" altLang="en-US" dirty="0">
+                <a:solidFill>
+                  <a:sysClr val="windowText" lastClr="000000"/>
+                </a:solidFill>
+              </a:rPr>
+              <a:t>그만두기</a:t>
+            </a:r>
+            <a:br>
+              <a:rPr lang="en-US" altLang="ko-KR" dirty="0">
+                <a:solidFill>
+                  <a:sysClr val="windowText" lastClr="000000"/>
+                </a:solidFill>
+              </a:rPr>
+            </a:br>
+            <a:r>
+              <a:rPr lang="en-US" altLang="ko-KR" dirty="0">
+                <a:solidFill>
+                  <a:sysClr val="windowText" lastClr="000000"/>
+                </a:solidFill>
+              </a:rPr>
+              <a:t>(</a:t>
+            </a:r>
+            <a:r>
+              <a:rPr lang="ko-KR" altLang="en-US" dirty="0">
+                <a:solidFill>
+                  <a:sysClr val="windowText" lastClr="000000"/>
+                </a:solidFill>
+              </a:rPr>
+              <a:t>진행 내용 저장 안됨</a:t>
+            </a:r>
+            <a:r>
+              <a:rPr lang="en-US" altLang="ko-KR" dirty="0">
+                <a:solidFill>
+                  <a:sysClr val="windowText" lastClr="000000"/>
+                </a:solidFill>
+              </a:rPr>
+              <a:t>)</a:t>
+            </a:r>
+            <a:endParaRPr lang="ko-KR" altLang="en-US" dirty="0">
+              <a:solidFill>
+                <a:sysClr val="windowText" lastClr="000000"/>
+              </a:solidFill>
+            </a:endParaRPr>
+          </a:p>
+        </p:txBody>
+      </p:sp>
+      <p:cxnSp>
+        <p:nvCxnSpPr>
+          <p:cNvPr id="30" name="직선 화살표 연결선 29">
+            <a:extLst>
+              <a:ext uri="{FF2B5EF4-FFF2-40B4-BE49-F238E27FC236}">
+                <a16:creationId xmlns:a16="http://schemas.microsoft.com/office/drawing/2014/main" id="{FB30C6B6-6031-1021-C9FE-FCAD94BED935}"/>
+              </a:ext>
+            </a:extLst>
+          </p:cNvPr>
+          <p:cNvCxnSpPr>
+            <a:cxnSpLocks/>
+          </p:cNvCxnSpPr>
+          <p:nvPr/>
+        </p:nvCxnSpPr>
+        <p:spPr>
+          <a:xfrm flipV="1">
+            <a:off x="9873671" y="3151909"/>
+            <a:ext cx="0" cy="1184560"/>
+          </a:xfrm>
+          <a:prstGeom prst="straightConnector1">
+            <a:avLst/>
+          </a:prstGeom>
+          <a:ln>
+            <a:solidFill>
+              <a:schemeClr val="tx1"/>
+            </a:solidFill>
+            <a:tailEnd type="triangle"/>
+          </a:ln>
+        </p:spPr>
+        <p:style>
+          <a:lnRef idx="1">
+            <a:schemeClr val="accent1"/>
+          </a:lnRef>
+          <a:fillRef idx="0">
+            <a:schemeClr val="accent1"/>
+          </a:fillRef>
+          <a:effectRef idx="0">
+            <a:schemeClr val="accent1"/>
+          </a:effectRef>
+          <a:fontRef idx="minor">
+            <a:schemeClr val="tx1"/>
+          </a:fontRef>
+        </p:style>
+      </p:cxnSp>
+      <p:sp>
+        <p:nvSpPr>
+          <p:cNvPr id="32" name="직사각형 31">
+            <a:extLst>
+              <a:ext uri="{FF2B5EF4-FFF2-40B4-BE49-F238E27FC236}">
+                <a16:creationId xmlns:a16="http://schemas.microsoft.com/office/drawing/2014/main" id="{8E45F31E-BD17-897A-EA9E-2E7B1681D666}"/>
+              </a:ext>
+            </a:extLst>
+          </p:cNvPr>
+          <p:cNvSpPr/>
+          <p:nvPr/>
+        </p:nvSpPr>
+        <p:spPr>
+          <a:xfrm>
+            <a:off x="8534399" y="2401452"/>
+            <a:ext cx="2678545" cy="738909"/>
+          </a:xfrm>
+          <a:prstGeom prst="rect">
+            <a:avLst/>
+          </a:prstGeom>
+          <a:noFill/>
+          <a:ln>
+            <a:solidFill>
+              <a:schemeClr val="tx1"/>
+            </a:solidFill>
+          </a:ln>
+        </p:spPr>
+        <p:style>
+          <a:lnRef idx="2">
+            <a:schemeClr val="accent1">
+              <a:shade val="15000"/>
+            </a:schemeClr>
+          </a:lnRef>
+          <a:fillRef idx="1">
+            <a:schemeClr val="accent1"/>
+          </a:fillRef>
+          <a:effectRef idx="0">
+            <a:schemeClr val="accent1"/>
+          </a:effectRef>
+          <a:fontRef idx="minor">
+            <a:schemeClr val="lt1"/>
+          </a:fontRef>
+        </p:style>
+        <p:txBody>
+          <a:bodyPr rtlCol="0" anchor="ctr"/>
+          <a:lstStyle/>
+          <a:p>
+            <a:pPr algn="ctr"/>
+            <a:r>
+              <a:rPr lang="ko-KR" altLang="en-US" dirty="0">
+                <a:solidFill>
+                  <a:sysClr val="windowText" lastClr="000000"/>
+                </a:solidFill>
+              </a:rPr>
+              <a:t>스테이지 완료</a:t>
+            </a:r>
+          </a:p>
+        </p:txBody>
+      </p:sp>
+      <p:cxnSp>
+        <p:nvCxnSpPr>
+          <p:cNvPr id="33" name="연결선: 꺾임 32">
+            <a:extLst>
+              <a:ext uri="{FF2B5EF4-FFF2-40B4-BE49-F238E27FC236}">
+                <a16:creationId xmlns:a16="http://schemas.microsoft.com/office/drawing/2014/main" id="{A0155921-7E9D-5B53-66DE-B4CDEFA329B7}"/>
+              </a:ext>
+            </a:extLst>
+          </p:cNvPr>
+          <p:cNvCxnSpPr>
+            <a:cxnSpLocks/>
+            <a:stCxn id="32" idx="1"/>
+          </p:cNvCxnSpPr>
+          <p:nvPr/>
+        </p:nvCxnSpPr>
+        <p:spPr>
+          <a:xfrm rot="10800000" flipV="1">
+            <a:off x="6363859" y="2770907"/>
+            <a:ext cx="2170540" cy="1579412"/>
+          </a:xfrm>
+          <a:prstGeom prst="bentConnector3">
+            <a:avLst>
+              <a:gd name="adj1" fmla="val 99787"/>
+            </a:avLst>
+          </a:prstGeom>
+          <a:ln>
+            <a:tailEnd type="triangle"/>
+          </a:ln>
+        </p:spPr>
+        <p:style>
+          <a:lnRef idx="1">
+            <a:schemeClr val="dk1"/>
+          </a:lnRef>
+          <a:fillRef idx="0">
+            <a:schemeClr val="dk1"/>
+          </a:fillRef>
+          <a:effectRef idx="0">
+            <a:schemeClr val="dk1"/>
+          </a:effectRef>
+          <a:fontRef idx="minor">
+            <a:schemeClr val="tx1"/>
+          </a:fontRef>
+        </p:style>
+      </p:cxnSp>
+      <p:sp>
+        <p:nvSpPr>
+          <p:cNvPr id="36" name="직사각형 35">
+            <a:extLst>
+              <a:ext uri="{FF2B5EF4-FFF2-40B4-BE49-F238E27FC236}">
+                <a16:creationId xmlns:a16="http://schemas.microsoft.com/office/drawing/2014/main" id="{DD562041-8F91-1CB8-FCA5-97ECB2CE3B1A}"/>
+              </a:ext>
+            </a:extLst>
+          </p:cNvPr>
+          <p:cNvSpPr/>
+          <p:nvPr/>
+        </p:nvSpPr>
+        <p:spPr>
+          <a:xfrm>
+            <a:off x="6960751" y="3669137"/>
+            <a:ext cx="2011222" cy="738909"/>
+          </a:xfrm>
+          <a:prstGeom prst="rect">
+            <a:avLst/>
+          </a:prstGeom>
+          <a:noFill/>
+          <a:ln>
+            <a:noFill/>
+          </a:ln>
+        </p:spPr>
+        <p:style>
+          <a:lnRef idx="2">
+            <a:schemeClr val="accent1">
+              <a:shade val="15000"/>
+            </a:schemeClr>
+          </a:lnRef>
+          <a:fillRef idx="1">
+            <a:schemeClr val="accent1"/>
+          </a:fillRef>
+          <a:effectRef idx="0">
+            <a:schemeClr val="accent1"/>
+          </a:effectRef>
+          <a:fontRef idx="minor">
+            <a:schemeClr val="lt1"/>
+          </a:fontRef>
+        </p:style>
+        <p:txBody>
+          <a:bodyPr rtlCol="0" anchor="ctr"/>
+          <a:lstStyle/>
+          <a:p>
+            <a:pPr algn="ctr"/>
+            <a:r>
+              <a:rPr lang="ko-KR" altLang="en-US" dirty="0">
+                <a:solidFill>
+                  <a:sysClr val="windowText" lastClr="000000"/>
+                </a:solidFill>
+              </a:rPr>
+              <a:t>스테이지 선택</a:t>
+            </a:r>
+          </a:p>
+        </p:txBody>
+      </p:sp>
+      <p:sp>
+        <p:nvSpPr>
+          <p:cNvPr id="39" name="직사각형 38">
+            <a:extLst>
+              <a:ext uri="{FF2B5EF4-FFF2-40B4-BE49-F238E27FC236}">
+                <a16:creationId xmlns:a16="http://schemas.microsoft.com/office/drawing/2014/main" id="{37E4557A-8692-7AF5-5804-B15E5B32F172}"/>
+              </a:ext>
+            </a:extLst>
+          </p:cNvPr>
+          <p:cNvSpPr/>
+          <p:nvPr/>
+        </p:nvSpPr>
+        <p:spPr>
+          <a:xfrm>
+            <a:off x="8151667" y="1719111"/>
+            <a:ext cx="3444008" cy="738909"/>
+          </a:xfrm>
+          <a:prstGeom prst="rect">
+            <a:avLst/>
+          </a:prstGeom>
+          <a:noFill/>
+          <a:ln>
+            <a:noFill/>
+          </a:ln>
+        </p:spPr>
+        <p:style>
+          <a:lnRef idx="2">
+            <a:schemeClr val="accent1">
+              <a:shade val="15000"/>
+            </a:schemeClr>
+          </a:lnRef>
+          <a:fillRef idx="1">
+            <a:schemeClr val="accent1"/>
+          </a:fillRef>
+          <a:effectRef idx="0">
+            <a:schemeClr val="accent1"/>
+          </a:effectRef>
+          <a:fontRef idx="minor">
+            <a:schemeClr val="lt1"/>
+          </a:fontRef>
+        </p:style>
+        <p:txBody>
+          <a:bodyPr rtlCol="0" anchor="ctr"/>
+          <a:lstStyle/>
+          <a:p>
+            <a:pPr algn="ctr"/>
+            <a:r>
+              <a:rPr lang="ko-KR" altLang="en-US" dirty="0">
+                <a:solidFill>
+                  <a:sysClr val="windowText" lastClr="000000"/>
+                </a:solidFill>
+              </a:rPr>
+              <a:t>진행 내용 및 기억회복률 저장</a:t>
             </a:r>
           </a:p>
         </p:txBody>
@@ -4305,10 +4948,1190 @@
           </a:prstGeom>
         </p:spPr>
       </p:pic>
+      <p:sp>
+        <p:nvSpPr>
+          <p:cNvPr id="4" name="직사각형 3">
+            <a:extLst>
+              <a:ext uri="{FF2B5EF4-FFF2-40B4-BE49-F238E27FC236}">
+                <a16:creationId xmlns:a16="http://schemas.microsoft.com/office/drawing/2014/main" id="{BFF6A46E-EC0F-77EA-1152-DD8FE5932DDC}"/>
+              </a:ext>
+            </a:extLst>
+          </p:cNvPr>
+          <p:cNvSpPr/>
+          <p:nvPr/>
+        </p:nvSpPr>
+        <p:spPr>
+          <a:xfrm>
+            <a:off x="7693892" y="1468460"/>
+            <a:ext cx="2364508" cy="267854"/>
+          </a:xfrm>
+          <a:prstGeom prst="rect">
+            <a:avLst/>
+          </a:prstGeom>
+          <a:solidFill>
+            <a:srgbClr val="00B0F0"/>
+          </a:solidFill>
+        </p:spPr>
+        <p:style>
+          <a:lnRef idx="2">
+            <a:schemeClr val="accent1">
+              <a:shade val="15000"/>
+            </a:schemeClr>
+          </a:lnRef>
+          <a:fillRef idx="1">
+            <a:schemeClr val="accent1"/>
+          </a:fillRef>
+          <a:effectRef idx="0">
+            <a:schemeClr val="accent1"/>
+          </a:effectRef>
+          <a:fontRef idx="minor">
+            <a:schemeClr val="lt1"/>
+          </a:fontRef>
+        </p:style>
+        <p:txBody>
+          <a:bodyPr rtlCol="0" anchor="ctr"/>
+          <a:lstStyle/>
+          <a:p>
+            <a:pPr algn="ctr"/>
+            <a:endParaRPr lang="ko-KR" altLang="en-US"/>
+          </a:p>
+        </p:txBody>
+      </p:sp>
+      <p:sp>
+        <p:nvSpPr>
+          <p:cNvPr id="5" name="TextBox 4">
+            <a:extLst>
+              <a:ext uri="{FF2B5EF4-FFF2-40B4-BE49-F238E27FC236}">
+                <a16:creationId xmlns:a16="http://schemas.microsoft.com/office/drawing/2014/main" id="{03A8947C-478A-FE61-37E8-C999C18F2FB8}"/>
+              </a:ext>
+            </a:extLst>
+          </p:cNvPr>
+          <p:cNvSpPr txBox="1"/>
+          <p:nvPr/>
+        </p:nvSpPr>
+        <p:spPr>
+          <a:xfrm>
+            <a:off x="7765472" y="484909"/>
+            <a:ext cx="2415309" cy="369332"/>
+          </a:xfrm>
+          <a:prstGeom prst="rect">
+            <a:avLst/>
+          </a:prstGeom>
+          <a:noFill/>
+        </p:spPr>
+        <p:txBody>
+          <a:bodyPr wrap="square" rtlCol="0">
+            <a:spAutoFit/>
+          </a:bodyPr>
+          <a:lstStyle/>
+          <a:p>
+            <a:pPr algn="ctr"/>
+            <a:r>
+              <a:rPr lang="ko-KR" altLang="en-US" dirty="0"/>
+              <a:t>기억회복률 게이지</a:t>
+            </a:r>
+          </a:p>
+        </p:txBody>
+      </p:sp>
+      <p:cxnSp>
+        <p:nvCxnSpPr>
+          <p:cNvPr id="7" name="직선 화살표 연결선 6">
+            <a:extLst>
+              <a:ext uri="{FF2B5EF4-FFF2-40B4-BE49-F238E27FC236}">
+                <a16:creationId xmlns:a16="http://schemas.microsoft.com/office/drawing/2014/main" id="{2AEEA79F-8D04-891F-224F-C0FE9EBAF70B}"/>
+              </a:ext>
+            </a:extLst>
+          </p:cNvPr>
+          <p:cNvCxnSpPr>
+            <a:cxnSpLocks/>
+          </p:cNvCxnSpPr>
+          <p:nvPr/>
+        </p:nvCxnSpPr>
+        <p:spPr>
+          <a:xfrm flipV="1">
+            <a:off x="8973127" y="854241"/>
+            <a:ext cx="0" cy="614219"/>
+          </a:xfrm>
+          <a:prstGeom prst="straightConnector1">
+            <a:avLst/>
+          </a:prstGeom>
+          <a:ln>
+            <a:solidFill>
+              <a:schemeClr val="tx1"/>
+            </a:solidFill>
+            <a:tailEnd type="triangle"/>
+          </a:ln>
+        </p:spPr>
+        <p:style>
+          <a:lnRef idx="1">
+            <a:schemeClr val="accent1"/>
+          </a:lnRef>
+          <a:fillRef idx="0">
+            <a:schemeClr val="accent1"/>
+          </a:fillRef>
+          <a:effectRef idx="0">
+            <a:schemeClr val="accent1"/>
+          </a:effectRef>
+          <a:fontRef idx="minor">
+            <a:schemeClr val="tx1"/>
+          </a:fontRef>
+        </p:style>
+      </p:cxnSp>
     </p:spTree>
     <p:extLst>
       <p:ext uri="{BB962C8B-B14F-4D97-AF65-F5344CB8AC3E}">
         <p14:creationId xmlns:p14="http://schemas.microsoft.com/office/powerpoint/2010/main" val="621652670"/>
+      </p:ext>
+    </p:extLst>
+  </p:cSld>
+  <p:clrMapOvr>
+    <a:masterClrMapping/>
+  </p:clrMapOvr>
+</p:sld>
+</file>
+
+<file path=ppt/slides/slide4.xml><?xml version="1.0" encoding="utf-8"?>
+<p:sld xmlns:a="http://schemas.openxmlformats.org/drawingml/2006/main" xmlns:r="http://schemas.openxmlformats.org/officeDocument/2006/relationships" xmlns:p="http://schemas.openxmlformats.org/presentationml/2006/main">
+  <p:cSld>
+    <p:spTree>
+      <p:nvGrpSpPr>
+        <p:cNvPr id="1" name="">
+          <a:extLst>
+            <a:ext uri="{FF2B5EF4-FFF2-40B4-BE49-F238E27FC236}">
+              <a16:creationId xmlns:a16="http://schemas.microsoft.com/office/drawing/2014/main" id="{C4F311C8-BC81-15FA-2E10-B9903B823321}"/>
+            </a:ext>
+          </a:extLst>
+        </p:cNvPr>
+        <p:cNvGrpSpPr/>
+        <p:nvPr/>
+      </p:nvGrpSpPr>
+      <p:grpSpPr>
+        <a:xfrm>
+          <a:off x="0" y="0"/>
+          <a:ext cx="0" cy="0"/>
+          <a:chOff x="0" y="0"/>
+          <a:chExt cx="0" cy="0"/>
+        </a:xfrm>
+      </p:grpSpPr>
+      <p:pic>
+        <p:nvPicPr>
+          <p:cNvPr id="10" name="그림 9">
+            <a:extLst>
+              <a:ext uri="{FF2B5EF4-FFF2-40B4-BE49-F238E27FC236}">
+                <a16:creationId xmlns:a16="http://schemas.microsoft.com/office/drawing/2014/main" id="{97819F5C-F752-D9EB-48AF-CDAC3FC18B1D}"/>
+              </a:ext>
+            </a:extLst>
+          </p:cNvPr>
+          <p:cNvPicPr>
+            <a:picLocks noChangeAspect="1"/>
+          </p:cNvPicPr>
+          <p:nvPr/>
+        </p:nvPicPr>
+        <p:blipFill>
+          <a:blip r:embed="rId2">
+            <a:extLst>
+              <a:ext uri="{28A0092B-C50C-407E-A947-70E740481C1C}">
+                <a14:useLocalDpi xmlns:a14="http://schemas.microsoft.com/office/drawing/2010/main" val="0"/>
+              </a:ext>
+            </a:extLst>
+          </a:blip>
+          <a:stretch>
+            <a:fillRect/>
+          </a:stretch>
+        </p:blipFill>
+        <p:spPr>
+          <a:xfrm>
+            <a:off x="1422398" y="2514599"/>
+            <a:ext cx="2789384" cy="2789384"/>
+          </a:xfrm>
+          <a:prstGeom prst="rect">
+            <a:avLst/>
+          </a:prstGeom>
+        </p:spPr>
+      </p:pic>
+      <p:sp>
+        <p:nvSpPr>
+          <p:cNvPr id="11" name="제목 1">
+            <a:extLst>
+              <a:ext uri="{FF2B5EF4-FFF2-40B4-BE49-F238E27FC236}">
+                <a16:creationId xmlns:a16="http://schemas.microsoft.com/office/drawing/2014/main" id="{1D734256-6E74-2F78-4D76-BEDCDF2E3FE1}"/>
+              </a:ext>
+            </a:extLst>
+          </p:cNvPr>
+          <p:cNvSpPr>
+            <a:spLocks noGrp="1"/>
+          </p:cNvSpPr>
+          <p:nvPr>
+            <p:ph type="ctrTitle"/>
+          </p:nvPr>
+        </p:nvSpPr>
+        <p:spPr>
+          <a:xfrm>
+            <a:off x="1681016" y="0"/>
+            <a:ext cx="9144000" cy="2387600"/>
+          </a:xfrm>
+        </p:spPr>
+        <p:txBody>
+          <a:bodyPr anchor="ctr"/>
+          <a:lstStyle/>
+          <a:p>
+            <a:r>
+              <a:rPr lang="ko-KR" altLang="en-US" dirty="0"/>
+              <a:t>캠프</a:t>
+            </a:r>
+          </a:p>
+        </p:txBody>
+      </p:sp>
+      <p:sp>
+        <p:nvSpPr>
+          <p:cNvPr id="12" name="TextBox 11">
+            <a:extLst>
+              <a:ext uri="{FF2B5EF4-FFF2-40B4-BE49-F238E27FC236}">
+                <a16:creationId xmlns:a16="http://schemas.microsoft.com/office/drawing/2014/main" id="{CD25AFB0-6349-79DE-726B-8AC5B50A2390}"/>
+              </a:ext>
+            </a:extLst>
+          </p:cNvPr>
+          <p:cNvSpPr txBox="1"/>
+          <p:nvPr/>
+        </p:nvSpPr>
+        <p:spPr>
+          <a:xfrm>
+            <a:off x="4784436" y="2189018"/>
+            <a:ext cx="6419273" cy="3693319"/>
+          </a:xfrm>
+          <a:prstGeom prst="rect">
+            <a:avLst/>
+          </a:prstGeom>
+          <a:noFill/>
+        </p:spPr>
+        <p:txBody>
+          <a:bodyPr wrap="square" rtlCol="0">
+            <a:spAutoFit/>
+          </a:bodyPr>
+          <a:lstStyle/>
+          <a:p>
+            <a:r>
+              <a:rPr lang="ko-KR" altLang="en-US" dirty="0"/>
+              <a:t>유적 내에 있는 오브젝트</a:t>
+            </a:r>
+            <a:endParaRPr lang="en-US" altLang="ko-KR" dirty="0"/>
+          </a:p>
+          <a:p>
+            <a:endParaRPr lang="en-US" altLang="ko-KR" dirty="0"/>
+          </a:p>
+          <a:p>
+            <a:r>
+              <a:rPr lang="ko-KR" altLang="en-US" dirty="0"/>
+              <a:t>유저와 상호작용으로 활성화 가능하며</a:t>
+            </a:r>
+            <a:r>
+              <a:rPr lang="en-US" altLang="ko-KR" dirty="0"/>
+              <a:t>, </a:t>
+            </a:r>
+            <a:r>
+              <a:rPr lang="ko-KR" altLang="en-US" dirty="0"/>
+              <a:t>가장 마지막으로 상호작용한 캠프만 활성화가 가능하다</a:t>
+            </a:r>
+            <a:r>
+              <a:rPr lang="en-US" altLang="ko-KR" dirty="0"/>
+              <a:t>.</a:t>
+            </a:r>
+          </a:p>
+          <a:p>
+            <a:endParaRPr lang="en-US" altLang="ko-KR" dirty="0"/>
+          </a:p>
+          <a:p>
+            <a:r>
+              <a:rPr lang="ko-KR" altLang="en-US" dirty="0"/>
+              <a:t>유저가 상호작용 시 </a:t>
+            </a:r>
+            <a:r>
+              <a:rPr lang="en-US" altLang="ko-KR" dirty="0"/>
+              <a:t>HP</a:t>
+            </a:r>
+            <a:r>
+              <a:rPr lang="ko-KR" altLang="en-US" dirty="0"/>
+              <a:t>를 전부 회복 가능하다</a:t>
+            </a:r>
+            <a:r>
+              <a:rPr lang="en-US" altLang="ko-KR" dirty="0"/>
+              <a:t>.</a:t>
+            </a:r>
+          </a:p>
+          <a:p>
+            <a:endParaRPr lang="en-US" altLang="ko-KR" dirty="0"/>
+          </a:p>
+          <a:p>
+            <a:r>
+              <a:rPr lang="ko-KR" altLang="en-US" dirty="0"/>
+              <a:t>유저가 </a:t>
+            </a:r>
+            <a:r>
+              <a:rPr lang="en-US" altLang="ko-KR" dirty="0"/>
+              <a:t>HP</a:t>
+            </a:r>
+            <a:r>
+              <a:rPr lang="ko-KR" altLang="en-US" dirty="0"/>
+              <a:t>를 모두 잃을 시</a:t>
+            </a:r>
+            <a:r>
+              <a:rPr lang="en-US" altLang="ko-KR" dirty="0"/>
+              <a:t>, </a:t>
+            </a:r>
+            <a:r>
+              <a:rPr lang="ko-KR" altLang="en-US" dirty="0"/>
+              <a:t>유저가 마지막으로 상호작용한 캠프의 위치에서 재시작을 할 수 있다</a:t>
+            </a:r>
+            <a:r>
+              <a:rPr lang="en-US" altLang="ko-KR" dirty="0"/>
+              <a:t>. </a:t>
+            </a:r>
+          </a:p>
+          <a:p>
+            <a:endParaRPr lang="en-US" altLang="ko-KR" dirty="0"/>
+          </a:p>
+          <a:p>
+            <a:r>
+              <a:rPr lang="ko-KR" altLang="en-US" dirty="0"/>
+              <a:t>캠프는 유저의 진행상황을 스테이지 내에서만 임시로 저장하며</a:t>
+            </a:r>
+            <a:r>
+              <a:rPr lang="en-US" altLang="ko-KR" dirty="0"/>
+              <a:t>, </a:t>
+            </a:r>
+            <a:r>
+              <a:rPr lang="ko-KR" altLang="en-US" dirty="0"/>
+              <a:t>유저가 메뉴를 통해 스테이지 밖으로 나갈 경우 진행 내용은 저장되지 않는다</a:t>
+            </a:r>
+            <a:r>
+              <a:rPr lang="en-US" altLang="ko-KR" dirty="0"/>
+              <a:t>. </a:t>
+            </a:r>
+            <a:endParaRPr lang="ko-KR" altLang="en-US" dirty="0"/>
+          </a:p>
+        </p:txBody>
+      </p:sp>
+      <p:sp>
+        <p:nvSpPr>
+          <p:cNvPr id="13" name="직사각형 12">
+            <a:extLst>
+              <a:ext uri="{FF2B5EF4-FFF2-40B4-BE49-F238E27FC236}">
+                <a16:creationId xmlns:a16="http://schemas.microsoft.com/office/drawing/2014/main" id="{BDE0960F-8424-2795-0A06-378B7191D685}"/>
+              </a:ext>
+            </a:extLst>
+          </p:cNvPr>
+          <p:cNvSpPr/>
+          <p:nvPr/>
+        </p:nvSpPr>
+        <p:spPr>
+          <a:xfrm>
+            <a:off x="988291" y="5430982"/>
+            <a:ext cx="3444008" cy="518463"/>
+          </a:xfrm>
+          <a:prstGeom prst="rect">
+            <a:avLst/>
+          </a:prstGeom>
+          <a:noFill/>
+          <a:ln>
+            <a:noFill/>
+          </a:ln>
+        </p:spPr>
+        <p:style>
+          <a:lnRef idx="2">
+            <a:schemeClr val="accent1">
+              <a:shade val="15000"/>
+            </a:schemeClr>
+          </a:lnRef>
+          <a:fillRef idx="1">
+            <a:schemeClr val="accent1"/>
+          </a:fillRef>
+          <a:effectRef idx="0">
+            <a:schemeClr val="accent1"/>
+          </a:effectRef>
+          <a:fontRef idx="minor">
+            <a:schemeClr val="lt1"/>
+          </a:fontRef>
+        </p:style>
+        <p:txBody>
+          <a:bodyPr rtlCol="0" anchor="ctr"/>
+          <a:lstStyle/>
+          <a:p>
+            <a:pPr algn="ctr"/>
+            <a:r>
+              <a:rPr lang="ko-KR" altLang="en-US" dirty="0">
+                <a:solidFill>
+                  <a:sysClr val="windowText" lastClr="000000"/>
+                </a:solidFill>
+              </a:rPr>
+              <a:t>예시 이미지</a:t>
+            </a:r>
+          </a:p>
+        </p:txBody>
+      </p:sp>
+    </p:spTree>
+    <p:extLst>
+      <p:ext uri="{BB962C8B-B14F-4D97-AF65-F5344CB8AC3E}">
+        <p14:creationId xmlns:p14="http://schemas.microsoft.com/office/powerpoint/2010/main" val="2684028697"/>
+      </p:ext>
+    </p:extLst>
+  </p:cSld>
+  <p:clrMapOvr>
+    <a:masterClrMapping/>
+  </p:clrMapOvr>
+</p:sld>
+</file>
+
+<file path=ppt/slides/slide5.xml><?xml version="1.0" encoding="utf-8"?>
+<p:sld xmlns:a="http://schemas.openxmlformats.org/drawingml/2006/main" xmlns:r="http://schemas.openxmlformats.org/officeDocument/2006/relationships" xmlns:p="http://schemas.openxmlformats.org/presentationml/2006/main">
+  <p:cSld>
+    <p:spTree>
+      <p:nvGrpSpPr>
+        <p:cNvPr id="1" name="">
+          <a:extLst>
+            <a:ext uri="{FF2B5EF4-FFF2-40B4-BE49-F238E27FC236}">
+              <a16:creationId xmlns:a16="http://schemas.microsoft.com/office/drawing/2014/main" id="{601075EF-0ABF-2E1B-0772-BD48DB21D221}"/>
+            </a:ext>
+          </a:extLst>
+        </p:cNvPr>
+        <p:cNvGrpSpPr/>
+        <p:nvPr/>
+      </p:nvGrpSpPr>
+      <p:grpSpPr>
+        <a:xfrm>
+          <a:off x="0" y="0"/>
+          <a:ext cx="0" cy="0"/>
+          <a:chOff x="0" y="0"/>
+          <a:chExt cx="0" cy="0"/>
+        </a:xfrm>
+      </p:grpSpPr>
+      <p:sp>
+        <p:nvSpPr>
+          <p:cNvPr id="11" name="제목 1">
+            <a:extLst>
+              <a:ext uri="{FF2B5EF4-FFF2-40B4-BE49-F238E27FC236}">
+                <a16:creationId xmlns:a16="http://schemas.microsoft.com/office/drawing/2014/main" id="{C4263B89-FCD1-4818-EFE0-AC1DC917704F}"/>
+              </a:ext>
+            </a:extLst>
+          </p:cNvPr>
+          <p:cNvSpPr>
+            <a:spLocks noGrp="1"/>
+          </p:cNvSpPr>
+          <p:nvPr>
+            <p:ph type="ctrTitle"/>
+          </p:nvPr>
+        </p:nvSpPr>
+        <p:spPr>
+          <a:xfrm>
+            <a:off x="1681016" y="0"/>
+            <a:ext cx="9144000" cy="1745673"/>
+          </a:xfrm>
+        </p:spPr>
+        <p:txBody>
+          <a:bodyPr anchor="ctr"/>
+          <a:lstStyle/>
+          <a:p>
+            <a:r>
+              <a:rPr lang="ko-KR" altLang="en-US" dirty="0"/>
+              <a:t>스테이지 </a:t>
+            </a:r>
+            <a:r>
+              <a:rPr lang="en-US" altLang="ko-KR" dirty="0"/>
+              <a:t>Select Room</a:t>
+            </a:r>
+            <a:endParaRPr lang="ko-KR" altLang="en-US" dirty="0"/>
+          </a:p>
+        </p:txBody>
+      </p:sp>
+      <p:sp>
+        <p:nvSpPr>
+          <p:cNvPr id="2" name="직사각형 1">
+            <a:extLst>
+              <a:ext uri="{FF2B5EF4-FFF2-40B4-BE49-F238E27FC236}">
+                <a16:creationId xmlns:a16="http://schemas.microsoft.com/office/drawing/2014/main" id="{236D796C-26F1-F901-545A-FE7DC22ACED1}"/>
+              </a:ext>
+            </a:extLst>
+          </p:cNvPr>
+          <p:cNvSpPr/>
+          <p:nvPr/>
+        </p:nvSpPr>
+        <p:spPr>
+          <a:xfrm>
+            <a:off x="1089891" y="1413164"/>
+            <a:ext cx="10418618" cy="5227781"/>
+          </a:xfrm>
+          <a:prstGeom prst="rect">
+            <a:avLst/>
+          </a:prstGeom>
+          <a:solidFill>
+            <a:schemeClr val="tx1"/>
+          </a:solidFill>
+        </p:spPr>
+        <p:style>
+          <a:lnRef idx="2">
+            <a:schemeClr val="accent1">
+              <a:shade val="15000"/>
+            </a:schemeClr>
+          </a:lnRef>
+          <a:fillRef idx="1">
+            <a:schemeClr val="accent1"/>
+          </a:fillRef>
+          <a:effectRef idx="0">
+            <a:schemeClr val="accent1"/>
+          </a:effectRef>
+          <a:fontRef idx="minor">
+            <a:schemeClr val="lt1"/>
+          </a:fontRef>
+        </p:style>
+        <p:txBody>
+          <a:bodyPr rtlCol="0" anchor="ctr"/>
+          <a:lstStyle/>
+          <a:p>
+            <a:pPr algn="ctr"/>
+            <a:endParaRPr lang="ko-KR" altLang="en-US"/>
+          </a:p>
+        </p:txBody>
+      </p:sp>
+      <p:sp>
+        <p:nvSpPr>
+          <p:cNvPr id="3" name="직사각형 2">
+            <a:extLst>
+              <a:ext uri="{FF2B5EF4-FFF2-40B4-BE49-F238E27FC236}">
+                <a16:creationId xmlns:a16="http://schemas.microsoft.com/office/drawing/2014/main" id="{3D661E38-6E9B-A850-9D07-98676F52D775}"/>
+              </a:ext>
+            </a:extLst>
+          </p:cNvPr>
+          <p:cNvSpPr/>
+          <p:nvPr/>
+        </p:nvSpPr>
+        <p:spPr>
+          <a:xfrm>
+            <a:off x="4858327" y="3325091"/>
+            <a:ext cx="2475346" cy="3001818"/>
+          </a:xfrm>
+          <a:prstGeom prst="rect">
+            <a:avLst/>
+          </a:prstGeom>
+          <a:solidFill>
+            <a:schemeClr val="bg1"/>
+          </a:solidFill>
+        </p:spPr>
+        <p:style>
+          <a:lnRef idx="2">
+            <a:schemeClr val="accent1">
+              <a:shade val="15000"/>
+            </a:schemeClr>
+          </a:lnRef>
+          <a:fillRef idx="1">
+            <a:schemeClr val="accent1"/>
+          </a:fillRef>
+          <a:effectRef idx="0">
+            <a:schemeClr val="accent1"/>
+          </a:effectRef>
+          <a:fontRef idx="minor">
+            <a:schemeClr val="lt1"/>
+          </a:fontRef>
+        </p:style>
+        <p:txBody>
+          <a:bodyPr rtlCol="0" anchor="ctr"/>
+          <a:lstStyle/>
+          <a:p>
+            <a:pPr algn="ctr"/>
+            <a:endParaRPr lang="ko-KR" altLang="en-US"/>
+          </a:p>
+        </p:txBody>
+      </p:sp>
+      <p:sp>
+        <p:nvSpPr>
+          <p:cNvPr id="4" name="직사각형 3">
+            <a:extLst>
+              <a:ext uri="{FF2B5EF4-FFF2-40B4-BE49-F238E27FC236}">
+                <a16:creationId xmlns:a16="http://schemas.microsoft.com/office/drawing/2014/main" id="{C4566132-D761-7F96-9050-87DDCFC24AF5}"/>
+              </a:ext>
+            </a:extLst>
+          </p:cNvPr>
+          <p:cNvSpPr/>
+          <p:nvPr/>
+        </p:nvSpPr>
+        <p:spPr>
+          <a:xfrm>
+            <a:off x="5606473" y="2290618"/>
+            <a:ext cx="1046018" cy="1034473"/>
+          </a:xfrm>
+          <a:prstGeom prst="rect">
+            <a:avLst/>
+          </a:prstGeom>
+          <a:solidFill>
+            <a:schemeClr val="bg1"/>
+          </a:solidFill>
+        </p:spPr>
+        <p:style>
+          <a:lnRef idx="2">
+            <a:schemeClr val="accent1">
+              <a:shade val="15000"/>
+            </a:schemeClr>
+          </a:lnRef>
+          <a:fillRef idx="1">
+            <a:schemeClr val="accent1"/>
+          </a:fillRef>
+          <a:effectRef idx="0">
+            <a:schemeClr val="accent1"/>
+          </a:effectRef>
+          <a:fontRef idx="minor">
+            <a:schemeClr val="lt1"/>
+          </a:fontRef>
+        </p:style>
+        <p:txBody>
+          <a:bodyPr rtlCol="0" anchor="ctr"/>
+          <a:lstStyle/>
+          <a:p>
+            <a:pPr algn="ctr"/>
+            <a:endParaRPr lang="ko-KR" altLang="en-US"/>
+          </a:p>
+        </p:txBody>
+      </p:sp>
+      <p:sp>
+        <p:nvSpPr>
+          <p:cNvPr id="5" name="직사각형 4">
+            <a:extLst>
+              <a:ext uri="{FF2B5EF4-FFF2-40B4-BE49-F238E27FC236}">
+                <a16:creationId xmlns:a16="http://schemas.microsoft.com/office/drawing/2014/main" id="{069A8937-73D5-8BD6-A837-0AB5B62D2CFD}"/>
+              </a:ext>
+            </a:extLst>
+          </p:cNvPr>
+          <p:cNvSpPr/>
+          <p:nvPr/>
+        </p:nvSpPr>
+        <p:spPr>
+          <a:xfrm>
+            <a:off x="5078267" y="1584036"/>
+            <a:ext cx="2102427" cy="392546"/>
+          </a:xfrm>
+          <a:prstGeom prst="rect">
+            <a:avLst/>
+          </a:prstGeom>
+          <a:solidFill>
+            <a:srgbClr val="FF0000"/>
+          </a:solidFill>
+        </p:spPr>
+        <p:style>
+          <a:lnRef idx="2">
+            <a:schemeClr val="accent1">
+              <a:shade val="15000"/>
+            </a:schemeClr>
+          </a:lnRef>
+          <a:fillRef idx="1">
+            <a:schemeClr val="accent1"/>
+          </a:fillRef>
+          <a:effectRef idx="0">
+            <a:schemeClr val="accent1"/>
+          </a:effectRef>
+          <a:fontRef idx="minor">
+            <a:schemeClr val="lt1"/>
+          </a:fontRef>
+        </p:style>
+        <p:txBody>
+          <a:bodyPr rtlCol="0" anchor="ctr"/>
+          <a:lstStyle/>
+          <a:p>
+            <a:pPr algn="ctr"/>
+            <a:r>
+              <a:rPr lang="en-US" altLang="ko-KR" dirty="0"/>
+              <a:t>Final Stage</a:t>
+            </a:r>
+            <a:endParaRPr lang="ko-KR" altLang="en-US" dirty="0"/>
+          </a:p>
+        </p:txBody>
+      </p:sp>
+      <p:sp>
+        <p:nvSpPr>
+          <p:cNvPr id="6" name="직사각형 5">
+            <a:extLst>
+              <a:ext uri="{FF2B5EF4-FFF2-40B4-BE49-F238E27FC236}">
+                <a16:creationId xmlns:a16="http://schemas.microsoft.com/office/drawing/2014/main" id="{F02C72C2-3FCD-7E81-A62A-0FCCDBF248C2}"/>
+              </a:ext>
+            </a:extLst>
+          </p:cNvPr>
+          <p:cNvSpPr/>
+          <p:nvPr/>
+        </p:nvSpPr>
+        <p:spPr>
+          <a:xfrm>
+            <a:off x="5044786" y="5895108"/>
+            <a:ext cx="2102427" cy="392546"/>
+          </a:xfrm>
+          <a:prstGeom prst="rect">
+            <a:avLst/>
+          </a:prstGeom>
+          <a:solidFill>
+            <a:srgbClr val="FF0000"/>
+          </a:solidFill>
+        </p:spPr>
+        <p:style>
+          <a:lnRef idx="2">
+            <a:schemeClr val="accent1">
+              <a:shade val="15000"/>
+            </a:schemeClr>
+          </a:lnRef>
+          <a:fillRef idx="1">
+            <a:schemeClr val="accent1"/>
+          </a:fillRef>
+          <a:effectRef idx="0">
+            <a:schemeClr val="accent1"/>
+          </a:effectRef>
+          <a:fontRef idx="minor">
+            <a:schemeClr val="lt1"/>
+          </a:fontRef>
+        </p:style>
+        <p:txBody>
+          <a:bodyPr rtlCol="0" anchor="ctr"/>
+          <a:lstStyle/>
+          <a:p>
+            <a:pPr algn="ctr"/>
+            <a:r>
+              <a:rPr lang="en-US" altLang="ko-KR" dirty="0"/>
+              <a:t>Start</a:t>
+            </a:r>
+            <a:endParaRPr lang="ko-KR" altLang="en-US" dirty="0"/>
+          </a:p>
+        </p:txBody>
+      </p:sp>
+      <p:sp>
+        <p:nvSpPr>
+          <p:cNvPr id="7" name="직사각형 6">
+            <a:extLst>
+              <a:ext uri="{FF2B5EF4-FFF2-40B4-BE49-F238E27FC236}">
+                <a16:creationId xmlns:a16="http://schemas.microsoft.com/office/drawing/2014/main" id="{75B59AC8-5713-8DEB-EBDB-905CD51A3ADF}"/>
+              </a:ext>
+            </a:extLst>
+          </p:cNvPr>
+          <p:cNvSpPr/>
+          <p:nvPr/>
+        </p:nvSpPr>
+        <p:spPr>
+          <a:xfrm>
+            <a:off x="2755900" y="5248563"/>
+            <a:ext cx="2102427" cy="392546"/>
+          </a:xfrm>
+          <a:prstGeom prst="rect">
+            <a:avLst/>
+          </a:prstGeom>
+          <a:solidFill>
+            <a:srgbClr val="FF0000"/>
+          </a:solidFill>
+        </p:spPr>
+        <p:style>
+          <a:lnRef idx="2">
+            <a:schemeClr val="accent1">
+              <a:shade val="15000"/>
+            </a:schemeClr>
+          </a:lnRef>
+          <a:fillRef idx="1">
+            <a:schemeClr val="accent1"/>
+          </a:fillRef>
+          <a:effectRef idx="0">
+            <a:schemeClr val="accent1"/>
+          </a:effectRef>
+          <a:fontRef idx="minor">
+            <a:schemeClr val="lt1"/>
+          </a:fontRef>
+        </p:style>
+        <p:txBody>
+          <a:bodyPr rtlCol="0" anchor="ctr"/>
+          <a:lstStyle/>
+          <a:p>
+            <a:pPr algn="ctr"/>
+            <a:r>
+              <a:rPr lang="en-US" altLang="ko-KR" dirty="0"/>
+              <a:t>Stage 1</a:t>
+            </a:r>
+            <a:endParaRPr lang="ko-KR" altLang="en-US" dirty="0"/>
+          </a:p>
+        </p:txBody>
+      </p:sp>
+      <p:sp>
+        <p:nvSpPr>
+          <p:cNvPr id="8" name="직사각형 7">
+            <a:extLst>
+              <a:ext uri="{FF2B5EF4-FFF2-40B4-BE49-F238E27FC236}">
+                <a16:creationId xmlns:a16="http://schemas.microsoft.com/office/drawing/2014/main" id="{18B3A553-82C9-8D09-34F9-B010D89EFA35}"/>
+              </a:ext>
+            </a:extLst>
+          </p:cNvPr>
+          <p:cNvSpPr/>
+          <p:nvPr/>
+        </p:nvSpPr>
+        <p:spPr>
+          <a:xfrm>
+            <a:off x="2755899" y="4142508"/>
+            <a:ext cx="2102427" cy="392546"/>
+          </a:xfrm>
+          <a:prstGeom prst="rect">
+            <a:avLst/>
+          </a:prstGeom>
+          <a:solidFill>
+            <a:srgbClr val="FF0000"/>
+          </a:solidFill>
+        </p:spPr>
+        <p:style>
+          <a:lnRef idx="2">
+            <a:schemeClr val="accent1">
+              <a:shade val="15000"/>
+            </a:schemeClr>
+          </a:lnRef>
+          <a:fillRef idx="1">
+            <a:schemeClr val="accent1"/>
+          </a:fillRef>
+          <a:effectRef idx="0">
+            <a:schemeClr val="accent1"/>
+          </a:effectRef>
+          <a:fontRef idx="minor">
+            <a:schemeClr val="lt1"/>
+          </a:fontRef>
+        </p:style>
+        <p:txBody>
+          <a:bodyPr rtlCol="0" anchor="ctr"/>
+          <a:lstStyle/>
+          <a:p>
+            <a:pPr algn="ctr"/>
+            <a:r>
+              <a:rPr lang="en-US" altLang="ko-KR" dirty="0"/>
+              <a:t>Stage 2</a:t>
+            </a:r>
+            <a:endParaRPr lang="ko-KR" altLang="en-US" dirty="0"/>
+          </a:p>
+        </p:txBody>
+      </p:sp>
+      <p:sp>
+        <p:nvSpPr>
+          <p:cNvPr id="9" name="직사각형 8">
+            <a:extLst>
+              <a:ext uri="{FF2B5EF4-FFF2-40B4-BE49-F238E27FC236}">
+                <a16:creationId xmlns:a16="http://schemas.microsoft.com/office/drawing/2014/main" id="{5A169F14-751F-36AD-B821-D1BB7A23777D}"/>
+              </a:ext>
+            </a:extLst>
+          </p:cNvPr>
+          <p:cNvSpPr/>
+          <p:nvPr/>
+        </p:nvSpPr>
+        <p:spPr>
+          <a:xfrm>
+            <a:off x="7333673" y="4142508"/>
+            <a:ext cx="2102427" cy="392546"/>
+          </a:xfrm>
+          <a:prstGeom prst="rect">
+            <a:avLst/>
+          </a:prstGeom>
+          <a:solidFill>
+            <a:srgbClr val="FF0000"/>
+          </a:solidFill>
+        </p:spPr>
+        <p:style>
+          <a:lnRef idx="2">
+            <a:schemeClr val="accent1">
+              <a:shade val="15000"/>
+            </a:schemeClr>
+          </a:lnRef>
+          <a:fillRef idx="1">
+            <a:schemeClr val="accent1"/>
+          </a:fillRef>
+          <a:effectRef idx="0">
+            <a:schemeClr val="accent1"/>
+          </a:effectRef>
+          <a:fontRef idx="minor">
+            <a:schemeClr val="lt1"/>
+          </a:fontRef>
+        </p:style>
+        <p:txBody>
+          <a:bodyPr rtlCol="0" anchor="ctr"/>
+          <a:lstStyle/>
+          <a:p>
+            <a:pPr algn="ctr"/>
+            <a:r>
+              <a:rPr lang="en-US" altLang="ko-KR" dirty="0"/>
+              <a:t>Stage 3</a:t>
+            </a:r>
+            <a:endParaRPr lang="ko-KR" altLang="en-US" dirty="0"/>
+          </a:p>
+        </p:txBody>
+      </p:sp>
+      <p:sp>
+        <p:nvSpPr>
+          <p:cNvPr id="14" name="직사각형 13">
+            <a:extLst>
+              <a:ext uri="{FF2B5EF4-FFF2-40B4-BE49-F238E27FC236}">
+                <a16:creationId xmlns:a16="http://schemas.microsoft.com/office/drawing/2014/main" id="{10AF9061-E414-C9EC-21C0-B8797E55385B}"/>
+              </a:ext>
+            </a:extLst>
+          </p:cNvPr>
+          <p:cNvSpPr/>
+          <p:nvPr/>
+        </p:nvSpPr>
+        <p:spPr>
+          <a:xfrm>
+            <a:off x="7333673" y="5234708"/>
+            <a:ext cx="2102427" cy="392546"/>
+          </a:xfrm>
+          <a:prstGeom prst="rect">
+            <a:avLst/>
+          </a:prstGeom>
+          <a:solidFill>
+            <a:srgbClr val="FF0000"/>
+          </a:solidFill>
+        </p:spPr>
+        <p:style>
+          <a:lnRef idx="2">
+            <a:schemeClr val="accent1">
+              <a:shade val="15000"/>
+            </a:schemeClr>
+          </a:lnRef>
+          <a:fillRef idx="1">
+            <a:schemeClr val="accent1"/>
+          </a:fillRef>
+          <a:effectRef idx="0">
+            <a:schemeClr val="accent1"/>
+          </a:effectRef>
+          <a:fontRef idx="minor">
+            <a:schemeClr val="lt1"/>
+          </a:fontRef>
+        </p:style>
+        <p:txBody>
+          <a:bodyPr rtlCol="0" anchor="ctr"/>
+          <a:lstStyle/>
+          <a:p>
+            <a:pPr algn="ctr"/>
+            <a:r>
+              <a:rPr lang="en-US" altLang="ko-KR" dirty="0"/>
+              <a:t>Stage 4</a:t>
+            </a:r>
+            <a:endParaRPr lang="ko-KR" altLang="en-US" dirty="0"/>
+          </a:p>
+        </p:txBody>
+      </p:sp>
+    </p:spTree>
+    <p:extLst>
+      <p:ext uri="{BB962C8B-B14F-4D97-AF65-F5344CB8AC3E}">
+        <p14:creationId xmlns:p14="http://schemas.microsoft.com/office/powerpoint/2010/main" val="1613480562"/>
+      </p:ext>
+    </p:extLst>
+  </p:cSld>
+  <p:clrMapOvr>
+    <a:masterClrMapping/>
+  </p:clrMapOvr>
+</p:sld>
+</file>
+
+<file path=ppt/slides/slide6.xml><?xml version="1.0" encoding="utf-8"?>
+<p:sld xmlns:a="http://schemas.openxmlformats.org/drawingml/2006/main" xmlns:r="http://schemas.openxmlformats.org/officeDocument/2006/relationships" xmlns:p="http://schemas.openxmlformats.org/presentationml/2006/main">
+  <p:cSld>
+    <p:spTree>
+      <p:nvGrpSpPr>
+        <p:cNvPr id="1" name="">
+          <a:extLst>
+            <a:ext uri="{FF2B5EF4-FFF2-40B4-BE49-F238E27FC236}">
+              <a16:creationId xmlns:a16="http://schemas.microsoft.com/office/drawing/2014/main" id="{AEA44D1A-1CDA-6F6A-9A9F-1881D32CA256}"/>
+            </a:ext>
+          </a:extLst>
+        </p:cNvPr>
+        <p:cNvGrpSpPr/>
+        <p:nvPr/>
+      </p:nvGrpSpPr>
+      <p:grpSpPr>
+        <a:xfrm>
+          <a:off x="0" y="0"/>
+          <a:ext cx="0" cy="0"/>
+          <a:chOff x="0" y="0"/>
+          <a:chExt cx="0" cy="0"/>
+        </a:xfrm>
+      </p:grpSpPr>
+      <p:sp>
+        <p:nvSpPr>
+          <p:cNvPr id="11" name="제목 1">
+            <a:extLst>
+              <a:ext uri="{FF2B5EF4-FFF2-40B4-BE49-F238E27FC236}">
+                <a16:creationId xmlns:a16="http://schemas.microsoft.com/office/drawing/2014/main" id="{DC6286DD-19AC-49BD-C50D-0B10BEEE22B7}"/>
+              </a:ext>
+            </a:extLst>
+          </p:cNvPr>
+          <p:cNvSpPr>
+            <a:spLocks noGrp="1"/>
+          </p:cNvSpPr>
+          <p:nvPr>
+            <p:ph type="ctrTitle"/>
+          </p:nvPr>
+        </p:nvSpPr>
+        <p:spPr>
+          <a:xfrm>
+            <a:off x="1681016" y="0"/>
+            <a:ext cx="9144000" cy="1745673"/>
+          </a:xfrm>
+        </p:spPr>
+        <p:txBody>
+          <a:bodyPr anchor="ctr"/>
+          <a:lstStyle/>
+          <a:p>
+            <a:r>
+              <a:rPr lang="ko-KR" altLang="en-US" dirty="0"/>
+              <a:t>스테이지 </a:t>
+            </a:r>
+            <a:r>
+              <a:rPr lang="en-US" altLang="ko-KR" dirty="0"/>
+              <a:t>Select Room</a:t>
+            </a:r>
+            <a:endParaRPr lang="ko-KR" altLang="en-US" dirty="0"/>
+          </a:p>
+        </p:txBody>
+      </p:sp>
+      <p:sp>
+        <p:nvSpPr>
+          <p:cNvPr id="10" name="TextBox 9">
+            <a:extLst>
+              <a:ext uri="{FF2B5EF4-FFF2-40B4-BE49-F238E27FC236}">
+                <a16:creationId xmlns:a16="http://schemas.microsoft.com/office/drawing/2014/main" id="{11903DDF-9A5A-07F7-9CAA-070C575E0E7B}"/>
+              </a:ext>
+            </a:extLst>
+          </p:cNvPr>
+          <p:cNvSpPr txBox="1"/>
+          <p:nvPr/>
+        </p:nvSpPr>
+        <p:spPr>
+          <a:xfrm>
+            <a:off x="914400" y="1828800"/>
+            <a:ext cx="10640291" cy="2308324"/>
+          </a:xfrm>
+          <a:prstGeom prst="rect">
+            <a:avLst/>
+          </a:prstGeom>
+          <a:noFill/>
+        </p:spPr>
+        <p:txBody>
+          <a:bodyPr wrap="square" rtlCol="0">
+            <a:spAutoFit/>
+          </a:bodyPr>
+          <a:lstStyle/>
+          <a:p>
+            <a:r>
+              <a:rPr lang="ko-KR" altLang="en-US" dirty="0"/>
+              <a:t>검은색 배경은 주인공의 기억이 없음을 상징</a:t>
+            </a:r>
+            <a:r>
+              <a:rPr lang="en-US" altLang="ko-KR" dirty="0"/>
+              <a:t> (</a:t>
+            </a:r>
+            <a:r>
+              <a:rPr lang="ko-KR" altLang="en-US" dirty="0"/>
+              <a:t>까맣게 잊어버렸다 등의 표현</a:t>
+            </a:r>
+            <a:r>
+              <a:rPr lang="en-US" altLang="ko-KR" dirty="0"/>
+              <a:t>), </a:t>
+            </a:r>
+            <a:r>
+              <a:rPr lang="ko-KR" altLang="en-US" dirty="0"/>
+              <a:t>주인공의 기억회복률에 따라 동이 트는 것 처럼 색상이 점점 하늘색으로 바뀜 </a:t>
+            </a:r>
+            <a:endParaRPr lang="en-US" altLang="ko-KR" dirty="0"/>
+          </a:p>
+          <a:p>
+            <a:endParaRPr lang="en-US" altLang="ko-KR" dirty="0"/>
+          </a:p>
+          <a:p>
+            <a:r>
+              <a:rPr lang="ko-KR" altLang="en-US" dirty="0"/>
+              <a:t>유저의 동선을 고려하여 </a:t>
+            </a:r>
+            <a:r>
+              <a:rPr lang="en-US" altLang="ko-KR" dirty="0"/>
+              <a:t>Stage </a:t>
+            </a:r>
+            <a:r>
+              <a:rPr lang="ko-KR" altLang="en-US" dirty="0"/>
+              <a:t>위치를 배치</a:t>
+            </a:r>
+            <a:r>
+              <a:rPr lang="en-US" altLang="ko-KR" dirty="0"/>
+              <a:t>, Stage1</a:t>
+            </a:r>
+            <a:r>
+              <a:rPr lang="ko-KR" altLang="en-US" dirty="0"/>
+              <a:t>은 시작하자마자 자동적으로 진행하게 되므로 나머지를 동선을 고려하였다</a:t>
+            </a:r>
+            <a:r>
+              <a:rPr lang="en-US" altLang="ko-KR" dirty="0"/>
+              <a:t>.</a:t>
+            </a:r>
+          </a:p>
+          <a:p>
+            <a:endParaRPr lang="en-US" altLang="ko-KR" dirty="0"/>
+          </a:p>
+          <a:p>
+            <a:r>
+              <a:rPr lang="en-US" altLang="ko-KR" dirty="0"/>
+              <a:t>Stage 4</a:t>
+            </a:r>
+            <a:r>
+              <a:rPr lang="ko-KR" altLang="en-US" dirty="0"/>
+              <a:t> 까지 전부 클리어하고 일정 기억회복률</a:t>
+            </a:r>
+            <a:r>
+              <a:rPr lang="en-US" altLang="ko-KR" dirty="0"/>
+              <a:t>(</a:t>
+            </a:r>
+            <a:r>
+              <a:rPr lang="ko-KR" altLang="en-US" dirty="0"/>
+              <a:t>미정</a:t>
+            </a:r>
+            <a:r>
+              <a:rPr lang="en-US" altLang="ko-KR" dirty="0"/>
+              <a:t>)</a:t>
+            </a:r>
+            <a:r>
+              <a:rPr lang="ko-KR" altLang="en-US" dirty="0"/>
+              <a:t>을 달성하면 </a:t>
+            </a:r>
+            <a:r>
+              <a:rPr lang="en-US" altLang="ko-KR" dirty="0"/>
+              <a:t>Final Stage</a:t>
+            </a:r>
+            <a:r>
+              <a:rPr lang="ko-KR" altLang="en-US" dirty="0"/>
+              <a:t>가 열린다</a:t>
+            </a:r>
+            <a:r>
+              <a:rPr lang="en-US" altLang="ko-KR" dirty="0"/>
+              <a:t>. Room4</a:t>
+            </a:r>
+            <a:r>
+              <a:rPr lang="ko-KR" altLang="en-US" dirty="0"/>
+              <a:t>를 </a:t>
+            </a:r>
+            <a:r>
+              <a:rPr lang="en-US" altLang="ko-KR" dirty="0"/>
+              <a:t>Final Stage</a:t>
+            </a:r>
+            <a:r>
+              <a:rPr lang="ko-KR" altLang="en-US" dirty="0"/>
+              <a:t>와 거리를 둠으로써 </a:t>
+            </a:r>
+            <a:r>
+              <a:rPr lang="en-US" altLang="ko-KR" dirty="0"/>
+              <a:t>Final Stage</a:t>
+            </a:r>
+            <a:r>
+              <a:rPr lang="ko-KR" altLang="en-US" dirty="0"/>
+              <a:t>에 들어가기 까지 긴장감을 더욱 줄 수 있다</a:t>
+            </a:r>
+            <a:r>
+              <a:rPr lang="en-US" altLang="ko-KR" dirty="0"/>
+              <a:t>.</a:t>
+            </a:r>
+            <a:endParaRPr lang="ko-KR" altLang="en-US" dirty="0"/>
+          </a:p>
+        </p:txBody>
+      </p:sp>
+    </p:spTree>
+    <p:extLst>
+      <p:ext uri="{BB962C8B-B14F-4D97-AF65-F5344CB8AC3E}">
+        <p14:creationId xmlns:p14="http://schemas.microsoft.com/office/powerpoint/2010/main" val="3585025292"/>
       </p:ext>
     </p:extLst>
   </p:cSld>

--- a/Documents/Trip of memories SYSTEM Flow Chart.pptx
+++ b/Documents/Trip of memories SYSTEM Flow Chart.pptx
@@ -264,7 +264,7 @@
           <a:p>
             <a:fld id="{8512E709-CF1F-47C0-9DB3-3BD313B99AA9}" type="datetimeFigureOut">
               <a:rPr lang="ko-KR" altLang="en-US" smtClean="0"/>
-              <a:t>2026-03-20</a:t>
+              <a:t>2026-03-25</a:t>
             </a:fld>
             <a:endParaRPr lang="ko-KR" altLang="en-US"/>
           </a:p>
@@ -462,7 +462,7 @@
           <a:p>
             <a:fld id="{8512E709-CF1F-47C0-9DB3-3BD313B99AA9}" type="datetimeFigureOut">
               <a:rPr lang="ko-KR" altLang="en-US" smtClean="0"/>
-              <a:t>2026-03-20</a:t>
+              <a:t>2026-03-25</a:t>
             </a:fld>
             <a:endParaRPr lang="ko-KR" altLang="en-US"/>
           </a:p>
@@ -670,7 +670,7 @@
           <a:p>
             <a:fld id="{8512E709-CF1F-47C0-9DB3-3BD313B99AA9}" type="datetimeFigureOut">
               <a:rPr lang="ko-KR" altLang="en-US" smtClean="0"/>
-              <a:t>2026-03-20</a:t>
+              <a:t>2026-03-25</a:t>
             </a:fld>
             <a:endParaRPr lang="ko-KR" altLang="en-US"/>
           </a:p>
@@ -868,7 +868,7 @@
           <a:p>
             <a:fld id="{8512E709-CF1F-47C0-9DB3-3BD313B99AA9}" type="datetimeFigureOut">
               <a:rPr lang="ko-KR" altLang="en-US" smtClean="0"/>
-              <a:t>2026-03-20</a:t>
+              <a:t>2026-03-25</a:t>
             </a:fld>
             <a:endParaRPr lang="ko-KR" altLang="en-US"/>
           </a:p>
@@ -1143,7 +1143,7 @@
           <a:p>
             <a:fld id="{8512E709-CF1F-47C0-9DB3-3BD313B99AA9}" type="datetimeFigureOut">
               <a:rPr lang="ko-KR" altLang="en-US" smtClean="0"/>
-              <a:t>2026-03-20</a:t>
+              <a:t>2026-03-25</a:t>
             </a:fld>
             <a:endParaRPr lang="ko-KR" altLang="en-US"/>
           </a:p>
@@ -1408,7 +1408,7 @@
           <a:p>
             <a:fld id="{8512E709-CF1F-47C0-9DB3-3BD313B99AA9}" type="datetimeFigureOut">
               <a:rPr lang="ko-KR" altLang="en-US" smtClean="0"/>
-              <a:t>2026-03-20</a:t>
+              <a:t>2026-03-25</a:t>
             </a:fld>
             <a:endParaRPr lang="ko-KR" altLang="en-US"/>
           </a:p>
@@ -1820,7 +1820,7 @@
           <a:p>
             <a:fld id="{8512E709-CF1F-47C0-9DB3-3BD313B99AA9}" type="datetimeFigureOut">
               <a:rPr lang="ko-KR" altLang="en-US" smtClean="0"/>
-              <a:t>2026-03-20</a:t>
+              <a:t>2026-03-25</a:t>
             </a:fld>
             <a:endParaRPr lang="ko-KR" altLang="en-US"/>
           </a:p>
@@ -1961,7 +1961,7 @@
           <a:p>
             <a:fld id="{8512E709-CF1F-47C0-9DB3-3BD313B99AA9}" type="datetimeFigureOut">
               <a:rPr lang="ko-KR" altLang="en-US" smtClean="0"/>
-              <a:t>2026-03-20</a:t>
+              <a:t>2026-03-25</a:t>
             </a:fld>
             <a:endParaRPr lang="ko-KR" altLang="en-US"/>
           </a:p>
@@ -2074,7 +2074,7 @@
           <a:p>
             <a:fld id="{8512E709-CF1F-47C0-9DB3-3BD313B99AA9}" type="datetimeFigureOut">
               <a:rPr lang="ko-KR" altLang="en-US" smtClean="0"/>
-              <a:t>2026-03-20</a:t>
+              <a:t>2026-03-25</a:t>
             </a:fld>
             <a:endParaRPr lang="ko-KR" altLang="en-US"/>
           </a:p>
@@ -2385,7 +2385,7 @@
           <a:p>
             <a:fld id="{8512E709-CF1F-47C0-9DB3-3BD313B99AA9}" type="datetimeFigureOut">
               <a:rPr lang="ko-KR" altLang="en-US" smtClean="0"/>
-              <a:t>2026-03-20</a:t>
+              <a:t>2026-03-25</a:t>
             </a:fld>
             <a:endParaRPr lang="ko-KR" altLang="en-US"/>
           </a:p>
@@ -2673,7 +2673,7 @@
           <a:p>
             <a:fld id="{8512E709-CF1F-47C0-9DB3-3BD313B99AA9}" type="datetimeFigureOut">
               <a:rPr lang="ko-KR" altLang="en-US" smtClean="0"/>
-              <a:t>2026-03-20</a:t>
+              <a:t>2026-03-25</a:t>
             </a:fld>
             <a:endParaRPr lang="ko-KR" altLang="en-US"/>
           </a:p>
@@ -2914,7 +2914,7 @@
           <a:p>
             <a:fld id="{8512E709-CF1F-47C0-9DB3-3BD313B99AA9}" type="datetimeFigureOut">
               <a:rPr lang="ko-KR" altLang="en-US" smtClean="0"/>
-              <a:t>2026-03-20</a:t>
+              <a:t>2026-03-25</a:t>
             </a:fld>
             <a:endParaRPr lang="ko-KR" altLang="en-US"/>
           </a:p>

--- a/Documents/Trip of memories SYSTEM Flow Chart.pptx
+++ b/Documents/Trip of memories SYSTEM Flow Chart.pptx
@@ -7,10 +7,11 @@
   <p:sldIdLst>
     <p:sldId id="256" r:id="rId2"/>
     <p:sldId id="257" r:id="rId3"/>
-    <p:sldId id="258" r:id="rId4"/>
-    <p:sldId id="259" r:id="rId5"/>
-    <p:sldId id="260" r:id="rId6"/>
-    <p:sldId id="261" r:id="rId7"/>
+    <p:sldId id="262" r:id="rId4"/>
+    <p:sldId id="258" r:id="rId5"/>
+    <p:sldId id="259" r:id="rId6"/>
+    <p:sldId id="260" r:id="rId7"/>
+    <p:sldId id="261" r:id="rId8"/>
   </p:sldIdLst>
   <p:sldSz cx="12192000" cy="6858000"/>
   <p:notesSz cx="6858000" cy="9144000"/>
@@ -4637,6 +4638,1101 @@
         <p:cNvPr id="1" name="">
           <a:extLst>
             <a:ext uri="{FF2B5EF4-FFF2-40B4-BE49-F238E27FC236}">
+              <a16:creationId xmlns:a16="http://schemas.microsoft.com/office/drawing/2014/main" id="{7F776B96-16A7-959A-DD19-827776394D6C}"/>
+            </a:ext>
+          </a:extLst>
+        </p:cNvPr>
+        <p:cNvGrpSpPr/>
+        <p:nvPr/>
+      </p:nvGrpSpPr>
+      <p:grpSpPr>
+        <a:xfrm>
+          <a:off x="0" y="0"/>
+          <a:ext cx="0" cy="0"/>
+          <a:chOff x="0" y="0"/>
+          <a:chExt cx="0" cy="0"/>
+        </a:xfrm>
+      </p:grpSpPr>
+      <p:sp>
+        <p:nvSpPr>
+          <p:cNvPr id="2" name="직사각형 1">
+            <a:extLst>
+              <a:ext uri="{FF2B5EF4-FFF2-40B4-BE49-F238E27FC236}">
+                <a16:creationId xmlns:a16="http://schemas.microsoft.com/office/drawing/2014/main" id="{F3D0FD6B-8E0C-6D99-B9CC-A3A7194AE653}"/>
+              </a:ext>
+            </a:extLst>
+          </p:cNvPr>
+          <p:cNvSpPr/>
+          <p:nvPr/>
+        </p:nvSpPr>
+        <p:spPr>
+          <a:xfrm>
+            <a:off x="1254086" y="820150"/>
+            <a:ext cx="2161308" cy="738909"/>
+          </a:xfrm>
+          <a:prstGeom prst="rect">
+            <a:avLst/>
+          </a:prstGeom>
+          <a:noFill/>
+          <a:ln>
+            <a:solidFill>
+              <a:schemeClr val="tx1"/>
+            </a:solidFill>
+          </a:ln>
+        </p:spPr>
+        <p:style>
+          <a:lnRef idx="2">
+            <a:schemeClr val="accent1">
+              <a:shade val="15000"/>
+            </a:schemeClr>
+          </a:lnRef>
+          <a:fillRef idx="1">
+            <a:schemeClr val="accent1"/>
+          </a:fillRef>
+          <a:effectRef idx="0">
+            <a:schemeClr val="accent1"/>
+          </a:effectRef>
+          <a:fontRef idx="minor">
+            <a:schemeClr val="lt1"/>
+          </a:fontRef>
+        </p:style>
+        <p:txBody>
+          <a:bodyPr rtlCol="0" anchor="ctr"/>
+          <a:lstStyle/>
+          <a:p>
+            <a:pPr algn="ctr"/>
+            <a:r>
+              <a:rPr lang="ko-KR" altLang="en-US">
+                <a:solidFill>
+                  <a:sysClr val="windowText" lastClr="000000"/>
+                </a:solidFill>
+              </a:rPr>
+              <a:t>스테이지 진행</a:t>
+            </a:r>
+            <a:endParaRPr lang="ko-KR" altLang="en-US" dirty="0">
+              <a:solidFill>
+                <a:sysClr val="windowText" lastClr="000000"/>
+              </a:solidFill>
+            </a:endParaRPr>
+          </a:p>
+        </p:txBody>
+      </p:sp>
+      <p:sp>
+        <p:nvSpPr>
+          <p:cNvPr id="6" name="직사각형 5">
+            <a:extLst>
+              <a:ext uri="{FF2B5EF4-FFF2-40B4-BE49-F238E27FC236}">
+                <a16:creationId xmlns:a16="http://schemas.microsoft.com/office/drawing/2014/main" id="{C6DBD519-1164-3F61-4FAD-7FDC75E4F656}"/>
+              </a:ext>
+            </a:extLst>
+          </p:cNvPr>
+          <p:cNvSpPr/>
+          <p:nvPr/>
+        </p:nvSpPr>
+        <p:spPr>
+          <a:xfrm>
+            <a:off x="1254086" y="2370338"/>
+            <a:ext cx="2161308" cy="738909"/>
+          </a:xfrm>
+          <a:prstGeom prst="rect">
+            <a:avLst/>
+          </a:prstGeom>
+          <a:noFill/>
+          <a:ln>
+            <a:solidFill>
+              <a:schemeClr val="tx1"/>
+            </a:solidFill>
+          </a:ln>
+        </p:spPr>
+        <p:style>
+          <a:lnRef idx="2">
+            <a:schemeClr val="accent1">
+              <a:shade val="15000"/>
+            </a:schemeClr>
+          </a:lnRef>
+          <a:fillRef idx="1">
+            <a:schemeClr val="accent1"/>
+          </a:fillRef>
+          <a:effectRef idx="0">
+            <a:schemeClr val="accent1"/>
+          </a:effectRef>
+          <a:fontRef idx="minor">
+            <a:schemeClr val="lt1"/>
+          </a:fontRef>
+        </p:style>
+        <p:txBody>
+          <a:bodyPr rtlCol="0" anchor="ctr"/>
+          <a:lstStyle/>
+          <a:p>
+            <a:pPr algn="ctr"/>
+            <a:r>
+              <a:rPr lang="ko-KR" altLang="en-US">
+                <a:solidFill>
+                  <a:sysClr val="windowText" lastClr="000000"/>
+                </a:solidFill>
+              </a:rPr>
+              <a:t>캠프 활성화</a:t>
+            </a:r>
+            <a:endParaRPr lang="ko-KR" altLang="en-US" dirty="0">
+              <a:solidFill>
+                <a:sysClr val="windowText" lastClr="000000"/>
+              </a:solidFill>
+            </a:endParaRPr>
+          </a:p>
+        </p:txBody>
+      </p:sp>
+      <p:cxnSp>
+        <p:nvCxnSpPr>
+          <p:cNvPr id="8" name="직선 화살표 연결선 7">
+            <a:extLst>
+              <a:ext uri="{FF2B5EF4-FFF2-40B4-BE49-F238E27FC236}">
+                <a16:creationId xmlns:a16="http://schemas.microsoft.com/office/drawing/2014/main" id="{AED68436-61B5-D20E-565F-11FB255EAC9F}"/>
+              </a:ext>
+            </a:extLst>
+          </p:cNvPr>
+          <p:cNvCxnSpPr>
+            <a:cxnSpLocks/>
+          </p:cNvCxnSpPr>
+          <p:nvPr/>
+        </p:nvCxnSpPr>
+        <p:spPr>
+          <a:xfrm>
+            <a:off x="2343617" y="1559059"/>
+            <a:ext cx="0" cy="811279"/>
+          </a:xfrm>
+          <a:prstGeom prst="straightConnector1">
+            <a:avLst/>
+          </a:prstGeom>
+          <a:ln>
+            <a:solidFill>
+              <a:schemeClr val="tx1"/>
+            </a:solidFill>
+            <a:tailEnd type="triangle"/>
+          </a:ln>
+        </p:spPr>
+        <p:style>
+          <a:lnRef idx="1">
+            <a:schemeClr val="accent1"/>
+          </a:lnRef>
+          <a:fillRef idx="0">
+            <a:schemeClr val="accent1"/>
+          </a:fillRef>
+          <a:effectRef idx="0">
+            <a:schemeClr val="accent1"/>
+          </a:effectRef>
+          <a:fontRef idx="minor">
+            <a:schemeClr val="tx1"/>
+          </a:fontRef>
+        </p:style>
+      </p:cxnSp>
+      <p:cxnSp>
+        <p:nvCxnSpPr>
+          <p:cNvPr id="14" name="직선 화살표 연결선 13">
+            <a:extLst>
+              <a:ext uri="{FF2B5EF4-FFF2-40B4-BE49-F238E27FC236}">
+                <a16:creationId xmlns:a16="http://schemas.microsoft.com/office/drawing/2014/main" id="{1B30FA76-534F-4FC7-729C-12C7DC59AB2F}"/>
+              </a:ext>
+            </a:extLst>
+          </p:cNvPr>
+          <p:cNvCxnSpPr>
+            <a:cxnSpLocks/>
+          </p:cNvCxnSpPr>
+          <p:nvPr/>
+        </p:nvCxnSpPr>
+        <p:spPr>
+          <a:xfrm>
+            <a:off x="2362088" y="3112651"/>
+            <a:ext cx="0" cy="420254"/>
+          </a:xfrm>
+          <a:prstGeom prst="straightConnector1">
+            <a:avLst/>
+          </a:prstGeom>
+          <a:ln>
+            <a:solidFill>
+              <a:schemeClr val="tx1"/>
+            </a:solidFill>
+            <a:tailEnd type="triangle"/>
+          </a:ln>
+        </p:spPr>
+        <p:style>
+          <a:lnRef idx="1">
+            <a:schemeClr val="accent1"/>
+          </a:lnRef>
+          <a:fillRef idx="0">
+            <a:schemeClr val="accent1"/>
+          </a:fillRef>
+          <a:effectRef idx="0">
+            <a:schemeClr val="accent1"/>
+          </a:effectRef>
+          <a:fontRef idx="minor">
+            <a:schemeClr val="tx1"/>
+          </a:fontRef>
+        </p:style>
+      </p:cxnSp>
+      <p:sp>
+        <p:nvSpPr>
+          <p:cNvPr id="17" name="다이아몬드 16">
+            <a:extLst>
+              <a:ext uri="{FF2B5EF4-FFF2-40B4-BE49-F238E27FC236}">
+                <a16:creationId xmlns:a16="http://schemas.microsoft.com/office/drawing/2014/main" id="{473782F4-8BC3-BE19-CC1C-3BCC7A9CFA5F}"/>
+              </a:ext>
+            </a:extLst>
+          </p:cNvPr>
+          <p:cNvSpPr/>
+          <p:nvPr/>
+        </p:nvSpPr>
+        <p:spPr>
+          <a:xfrm>
+            <a:off x="1184454" y="3544446"/>
+            <a:ext cx="2318325" cy="563422"/>
+          </a:xfrm>
+          <a:prstGeom prst="diamond">
+            <a:avLst/>
+          </a:prstGeom>
+          <a:noFill/>
+          <a:ln>
+            <a:solidFill>
+              <a:schemeClr val="tx1"/>
+            </a:solidFill>
+          </a:ln>
+        </p:spPr>
+        <p:style>
+          <a:lnRef idx="2">
+            <a:schemeClr val="accent1">
+              <a:shade val="15000"/>
+            </a:schemeClr>
+          </a:lnRef>
+          <a:fillRef idx="1">
+            <a:schemeClr val="accent1"/>
+          </a:fillRef>
+          <a:effectRef idx="0">
+            <a:schemeClr val="accent1"/>
+          </a:effectRef>
+          <a:fontRef idx="minor">
+            <a:schemeClr val="lt1"/>
+          </a:fontRef>
+        </p:style>
+        <p:txBody>
+          <a:bodyPr rtlCol="0" anchor="ctr"/>
+          <a:lstStyle/>
+          <a:p>
+            <a:pPr algn="ctr"/>
+            <a:r>
+              <a:rPr lang="en-US" altLang="ko-KR" dirty="0">
+                <a:solidFill>
+                  <a:sysClr val="windowText" lastClr="000000"/>
+                </a:solidFill>
+              </a:rPr>
+              <a:t>Life = 0 </a:t>
+            </a:r>
+            <a:endParaRPr lang="ko-KR" altLang="en-US" dirty="0">
+              <a:solidFill>
+                <a:sysClr val="windowText" lastClr="000000"/>
+              </a:solidFill>
+            </a:endParaRPr>
+          </a:p>
+        </p:txBody>
+      </p:sp>
+      <p:cxnSp>
+        <p:nvCxnSpPr>
+          <p:cNvPr id="21" name="연결선: 꺾임 20">
+            <a:extLst>
+              <a:ext uri="{FF2B5EF4-FFF2-40B4-BE49-F238E27FC236}">
+                <a16:creationId xmlns:a16="http://schemas.microsoft.com/office/drawing/2014/main" id="{E50224F0-1414-DD0A-4DBA-B666B870F85F}"/>
+              </a:ext>
+            </a:extLst>
+          </p:cNvPr>
+          <p:cNvCxnSpPr>
+            <a:cxnSpLocks/>
+            <a:stCxn id="17" idx="3"/>
+            <a:endCxn id="26" idx="2"/>
+          </p:cNvCxnSpPr>
+          <p:nvPr/>
+        </p:nvCxnSpPr>
+        <p:spPr>
+          <a:xfrm flipV="1">
+            <a:off x="3502779" y="3109247"/>
+            <a:ext cx="3929355" cy="716910"/>
+          </a:xfrm>
+          <a:prstGeom prst="bentConnector2">
+            <a:avLst/>
+          </a:prstGeom>
+          <a:ln>
+            <a:tailEnd type="triangle"/>
+          </a:ln>
+        </p:spPr>
+        <p:style>
+          <a:lnRef idx="1">
+            <a:schemeClr val="dk1"/>
+          </a:lnRef>
+          <a:fillRef idx="0">
+            <a:schemeClr val="dk1"/>
+          </a:fillRef>
+          <a:effectRef idx="0">
+            <a:schemeClr val="dk1"/>
+          </a:effectRef>
+          <a:fontRef idx="minor">
+            <a:schemeClr val="tx1"/>
+          </a:fontRef>
+        </p:style>
+      </p:cxnSp>
+      <p:sp>
+        <p:nvSpPr>
+          <p:cNvPr id="26" name="직사각형 25">
+            <a:extLst>
+              <a:ext uri="{FF2B5EF4-FFF2-40B4-BE49-F238E27FC236}">
+                <a16:creationId xmlns:a16="http://schemas.microsoft.com/office/drawing/2014/main" id="{63DC14A0-1F5E-64A1-89D9-B8B866317672}"/>
+              </a:ext>
+            </a:extLst>
+          </p:cNvPr>
+          <p:cNvSpPr/>
+          <p:nvPr/>
+        </p:nvSpPr>
+        <p:spPr>
+          <a:xfrm>
+            <a:off x="6351480" y="2370338"/>
+            <a:ext cx="2161308" cy="738909"/>
+          </a:xfrm>
+          <a:prstGeom prst="rect">
+            <a:avLst/>
+          </a:prstGeom>
+          <a:noFill/>
+          <a:ln>
+            <a:solidFill>
+              <a:schemeClr val="tx1"/>
+            </a:solidFill>
+          </a:ln>
+        </p:spPr>
+        <p:style>
+          <a:lnRef idx="2">
+            <a:schemeClr val="accent1">
+              <a:shade val="15000"/>
+            </a:schemeClr>
+          </a:lnRef>
+          <a:fillRef idx="1">
+            <a:schemeClr val="accent1"/>
+          </a:fillRef>
+          <a:effectRef idx="0">
+            <a:schemeClr val="accent1"/>
+          </a:effectRef>
+          <a:fontRef idx="minor">
+            <a:schemeClr val="lt1"/>
+          </a:fontRef>
+        </p:style>
+        <p:txBody>
+          <a:bodyPr rtlCol="0" anchor="ctr"/>
+          <a:lstStyle/>
+          <a:p>
+            <a:pPr algn="ctr"/>
+            <a:r>
+              <a:rPr lang="ko-KR" altLang="en-US" dirty="0">
+                <a:solidFill>
+                  <a:sysClr val="windowText" lastClr="000000"/>
+                </a:solidFill>
+              </a:rPr>
+              <a:t>마지막 활성화된 캠프로 이동</a:t>
+            </a:r>
+          </a:p>
+        </p:txBody>
+      </p:sp>
+      <p:sp>
+        <p:nvSpPr>
+          <p:cNvPr id="31" name="직사각형 30">
+            <a:extLst>
+              <a:ext uri="{FF2B5EF4-FFF2-40B4-BE49-F238E27FC236}">
+                <a16:creationId xmlns:a16="http://schemas.microsoft.com/office/drawing/2014/main" id="{E66A7490-9F91-5F71-2184-1582227E4A54}"/>
+              </a:ext>
+            </a:extLst>
+          </p:cNvPr>
+          <p:cNvSpPr/>
+          <p:nvPr/>
+        </p:nvSpPr>
+        <p:spPr>
+          <a:xfrm>
+            <a:off x="3502779" y="2370338"/>
+            <a:ext cx="2479379" cy="738909"/>
+          </a:xfrm>
+          <a:prstGeom prst="rect">
+            <a:avLst/>
+          </a:prstGeom>
+          <a:noFill/>
+          <a:ln>
+            <a:noFill/>
+          </a:ln>
+        </p:spPr>
+        <p:style>
+          <a:lnRef idx="2">
+            <a:schemeClr val="accent1">
+              <a:shade val="15000"/>
+            </a:schemeClr>
+          </a:lnRef>
+          <a:fillRef idx="1">
+            <a:schemeClr val="accent1"/>
+          </a:fillRef>
+          <a:effectRef idx="0">
+            <a:schemeClr val="accent1"/>
+          </a:effectRef>
+          <a:fontRef idx="minor">
+            <a:schemeClr val="lt1"/>
+          </a:fontRef>
+        </p:style>
+        <p:txBody>
+          <a:bodyPr rtlCol="0" anchor="ctr"/>
+          <a:lstStyle/>
+          <a:p>
+            <a:pPr algn="ctr"/>
+            <a:r>
+              <a:rPr lang="ko-KR" altLang="en-US" dirty="0">
+                <a:solidFill>
+                  <a:sysClr val="windowText" lastClr="000000"/>
+                </a:solidFill>
+              </a:rPr>
+              <a:t>기억 회복률 변화 및 캠프 활성화 저장</a:t>
+            </a:r>
+          </a:p>
+        </p:txBody>
+      </p:sp>
+      <p:sp>
+        <p:nvSpPr>
+          <p:cNvPr id="34" name="직사각형 33">
+            <a:extLst>
+              <a:ext uri="{FF2B5EF4-FFF2-40B4-BE49-F238E27FC236}">
+                <a16:creationId xmlns:a16="http://schemas.microsoft.com/office/drawing/2014/main" id="{58723859-69A9-ACB5-4F39-5527BB3AC84B}"/>
+              </a:ext>
+            </a:extLst>
+          </p:cNvPr>
+          <p:cNvSpPr/>
+          <p:nvPr/>
+        </p:nvSpPr>
+        <p:spPr>
+          <a:xfrm>
+            <a:off x="4680414" y="3228103"/>
+            <a:ext cx="798950" cy="738909"/>
+          </a:xfrm>
+          <a:prstGeom prst="rect">
+            <a:avLst/>
+          </a:prstGeom>
+          <a:noFill/>
+          <a:ln>
+            <a:noFill/>
+          </a:ln>
+        </p:spPr>
+        <p:style>
+          <a:lnRef idx="2">
+            <a:schemeClr val="accent1">
+              <a:shade val="15000"/>
+            </a:schemeClr>
+          </a:lnRef>
+          <a:fillRef idx="1">
+            <a:schemeClr val="accent1"/>
+          </a:fillRef>
+          <a:effectRef idx="0">
+            <a:schemeClr val="accent1"/>
+          </a:effectRef>
+          <a:fontRef idx="minor">
+            <a:schemeClr val="lt1"/>
+          </a:fontRef>
+        </p:style>
+        <p:txBody>
+          <a:bodyPr rtlCol="0" anchor="ctr"/>
+          <a:lstStyle/>
+          <a:p>
+            <a:pPr algn="ctr"/>
+            <a:r>
+              <a:rPr lang="ko-KR" altLang="en-US" dirty="0">
+                <a:solidFill>
+                  <a:sysClr val="windowText" lastClr="000000"/>
+                </a:solidFill>
+              </a:rPr>
+              <a:t>예</a:t>
+            </a:r>
+          </a:p>
+        </p:txBody>
+      </p:sp>
+      <p:sp>
+        <p:nvSpPr>
+          <p:cNvPr id="35" name="직사각형 34">
+            <a:extLst>
+              <a:ext uri="{FF2B5EF4-FFF2-40B4-BE49-F238E27FC236}">
+                <a16:creationId xmlns:a16="http://schemas.microsoft.com/office/drawing/2014/main" id="{B42FB245-DEBD-D09E-F8B2-2A6A535D0FD1}"/>
+              </a:ext>
+            </a:extLst>
+          </p:cNvPr>
+          <p:cNvSpPr/>
+          <p:nvPr/>
+        </p:nvSpPr>
+        <p:spPr>
+          <a:xfrm>
+            <a:off x="2057467" y="4173612"/>
+            <a:ext cx="2161308" cy="738909"/>
+          </a:xfrm>
+          <a:prstGeom prst="rect">
+            <a:avLst/>
+          </a:prstGeom>
+          <a:noFill/>
+          <a:ln>
+            <a:noFill/>
+          </a:ln>
+        </p:spPr>
+        <p:style>
+          <a:lnRef idx="2">
+            <a:schemeClr val="accent1">
+              <a:shade val="15000"/>
+            </a:schemeClr>
+          </a:lnRef>
+          <a:fillRef idx="1">
+            <a:schemeClr val="accent1"/>
+          </a:fillRef>
+          <a:effectRef idx="0">
+            <a:schemeClr val="accent1"/>
+          </a:effectRef>
+          <a:fontRef idx="minor">
+            <a:schemeClr val="lt1"/>
+          </a:fontRef>
+        </p:style>
+        <p:txBody>
+          <a:bodyPr rtlCol="0" anchor="ctr"/>
+          <a:lstStyle/>
+          <a:p>
+            <a:pPr algn="ctr"/>
+            <a:r>
+              <a:rPr lang="ko-KR" altLang="en-US" dirty="0">
+                <a:solidFill>
+                  <a:sysClr val="windowText" lastClr="000000"/>
+                </a:solidFill>
+              </a:rPr>
+              <a:t>아니요</a:t>
+            </a:r>
+          </a:p>
+        </p:txBody>
+      </p:sp>
+      <p:cxnSp>
+        <p:nvCxnSpPr>
+          <p:cNvPr id="37" name="직선 화살표 연결선 36">
+            <a:extLst>
+              <a:ext uri="{FF2B5EF4-FFF2-40B4-BE49-F238E27FC236}">
+                <a16:creationId xmlns:a16="http://schemas.microsoft.com/office/drawing/2014/main" id="{E09F099C-6D83-4108-50FB-2EDF4D586F50}"/>
+              </a:ext>
+            </a:extLst>
+          </p:cNvPr>
+          <p:cNvCxnSpPr>
+            <a:cxnSpLocks/>
+          </p:cNvCxnSpPr>
+          <p:nvPr/>
+        </p:nvCxnSpPr>
+        <p:spPr>
+          <a:xfrm>
+            <a:off x="2334740" y="4122812"/>
+            <a:ext cx="0" cy="715518"/>
+          </a:xfrm>
+          <a:prstGeom prst="straightConnector1">
+            <a:avLst/>
+          </a:prstGeom>
+          <a:ln>
+            <a:solidFill>
+              <a:schemeClr val="tx1"/>
+            </a:solidFill>
+            <a:tailEnd type="triangle"/>
+          </a:ln>
+        </p:spPr>
+        <p:style>
+          <a:lnRef idx="1">
+            <a:schemeClr val="accent1"/>
+          </a:lnRef>
+          <a:fillRef idx="0">
+            <a:schemeClr val="accent1"/>
+          </a:fillRef>
+          <a:effectRef idx="0">
+            <a:schemeClr val="accent1"/>
+          </a:effectRef>
+          <a:fontRef idx="minor">
+            <a:schemeClr val="tx1"/>
+          </a:fontRef>
+        </p:style>
+      </p:cxnSp>
+      <p:sp>
+        <p:nvSpPr>
+          <p:cNvPr id="40" name="다이아몬드 39">
+            <a:extLst>
+              <a:ext uri="{FF2B5EF4-FFF2-40B4-BE49-F238E27FC236}">
+                <a16:creationId xmlns:a16="http://schemas.microsoft.com/office/drawing/2014/main" id="{3C56927A-62AB-B749-C58F-DA91D21DD748}"/>
+              </a:ext>
+            </a:extLst>
+          </p:cNvPr>
+          <p:cNvSpPr/>
+          <p:nvPr/>
+        </p:nvSpPr>
+        <p:spPr>
+          <a:xfrm>
+            <a:off x="1175577" y="4853274"/>
+            <a:ext cx="2318325" cy="563422"/>
+          </a:xfrm>
+          <a:prstGeom prst="diamond">
+            <a:avLst/>
+          </a:prstGeom>
+          <a:noFill/>
+          <a:ln>
+            <a:solidFill>
+              <a:schemeClr val="tx1"/>
+            </a:solidFill>
+          </a:ln>
+        </p:spPr>
+        <p:style>
+          <a:lnRef idx="2">
+            <a:schemeClr val="accent1">
+              <a:shade val="15000"/>
+            </a:schemeClr>
+          </a:lnRef>
+          <a:fillRef idx="1">
+            <a:schemeClr val="accent1"/>
+          </a:fillRef>
+          <a:effectRef idx="0">
+            <a:schemeClr val="accent1"/>
+          </a:effectRef>
+          <a:fontRef idx="minor">
+            <a:schemeClr val="lt1"/>
+          </a:fontRef>
+        </p:style>
+        <p:txBody>
+          <a:bodyPr rtlCol="0" anchor="ctr"/>
+          <a:lstStyle/>
+          <a:p>
+            <a:pPr algn="ctr"/>
+            <a:r>
+              <a:rPr lang="ko-KR" altLang="en-US" dirty="0">
+                <a:solidFill>
+                  <a:sysClr val="windowText" lastClr="000000"/>
+                </a:solidFill>
+              </a:rPr>
+              <a:t>그만두기</a:t>
+            </a:r>
+          </a:p>
+        </p:txBody>
+      </p:sp>
+      <p:sp>
+        <p:nvSpPr>
+          <p:cNvPr id="41" name="직사각형 40">
+            <a:extLst>
+              <a:ext uri="{FF2B5EF4-FFF2-40B4-BE49-F238E27FC236}">
+                <a16:creationId xmlns:a16="http://schemas.microsoft.com/office/drawing/2014/main" id="{C0051F46-B24B-0980-7542-962E29DE21B5}"/>
+              </a:ext>
+            </a:extLst>
+          </p:cNvPr>
+          <p:cNvSpPr/>
+          <p:nvPr/>
+        </p:nvSpPr>
+        <p:spPr>
+          <a:xfrm>
+            <a:off x="4667317" y="4473913"/>
+            <a:ext cx="798950" cy="738909"/>
+          </a:xfrm>
+          <a:prstGeom prst="rect">
+            <a:avLst/>
+          </a:prstGeom>
+          <a:noFill/>
+          <a:ln>
+            <a:noFill/>
+          </a:ln>
+        </p:spPr>
+        <p:style>
+          <a:lnRef idx="2">
+            <a:schemeClr val="accent1">
+              <a:shade val="15000"/>
+            </a:schemeClr>
+          </a:lnRef>
+          <a:fillRef idx="1">
+            <a:schemeClr val="accent1"/>
+          </a:fillRef>
+          <a:effectRef idx="0">
+            <a:schemeClr val="accent1"/>
+          </a:effectRef>
+          <a:fontRef idx="minor">
+            <a:schemeClr val="lt1"/>
+          </a:fontRef>
+        </p:style>
+        <p:txBody>
+          <a:bodyPr rtlCol="0" anchor="ctr"/>
+          <a:lstStyle/>
+          <a:p>
+            <a:pPr algn="ctr"/>
+            <a:r>
+              <a:rPr lang="ko-KR" altLang="en-US" dirty="0">
+                <a:solidFill>
+                  <a:sysClr val="windowText" lastClr="000000"/>
+                </a:solidFill>
+              </a:rPr>
+              <a:t>예</a:t>
+            </a:r>
+          </a:p>
+        </p:txBody>
+      </p:sp>
+      <p:cxnSp>
+        <p:nvCxnSpPr>
+          <p:cNvPr id="45" name="직선 화살표 연결선 44">
+            <a:extLst>
+              <a:ext uri="{FF2B5EF4-FFF2-40B4-BE49-F238E27FC236}">
+                <a16:creationId xmlns:a16="http://schemas.microsoft.com/office/drawing/2014/main" id="{183F7375-FD0A-898D-FC6A-69D78FDFD1CD}"/>
+              </a:ext>
+            </a:extLst>
+          </p:cNvPr>
+          <p:cNvCxnSpPr>
+            <a:stCxn id="40" idx="3"/>
+          </p:cNvCxnSpPr>
+          <p:nvPr/>
+        </p:nvCxnSpPr>
+        <p:spPr>
+          <a:xfrm>
+            <a:off x="3493902" y="5134985"/>
+            <a:ext cx="3821298" cy="0"/>
+          </a:xfrm>
+          <a:prstGeom prst="straightConnector1">
+            <a:avLst/>
+          </a:prstGeom>
+          <a:ln>
+            <a:tailEnd type="triangle"/>
+          </a:ln>
+        </p:spPr>
+        <p:style>
+          <a:lnRef idx="1">
+            <a:schemeClr val="dk1"/>
+          </a:lnRef>
+          <a:fillRef idx="0">
+            <a:schemeClr val="dk1"/>
+          </a:fillRef>
+          <a:effectRef idx="0">
+            <a:schemeClr val="dk1"/>
+          </a:effectRef>
+          <a:fontRef idx="minor">
+            <a:schemeClr val="tx1"/>
+          </a:fontRef>
+        </p:style>
+      </p:cxnSp>
+      <p:sp>
+        <p:nvSpPr>
+          <p:cNvPr id="46" name="직사각형 45">
+            <a:extLst>
+              <a:ext uri="{FF2B5EF4-FFF2-40B4-BE49-F238E27FC236}">
+                <a16:creationId xmlns:a16="http://schemas.microsoft.com/office/drawing/2014/main" id="{CA047F0F-47A8-5279-3CCB-765553AC3E2A}"/>
+              </a:ext>
+            </a:extLst>
+          </p:cNvPr>
+          <p:cNvSpPr/>
+          <p:nvPr/>
+        </p:nvSpPr>
+        <p:spPr>
+          <a:xfrm>
+            <a:off x="7315200" y="4677787"/>
+            <a:ext cx="3160450" cy="738909"/>
+          </a:xfrm>
+          <a:prstGeom prst="rect">
+            <a:avLst/>
+          </a:prstGeom>
+          <a:noFill/>
+          <a:ln>
+            <a:solidFill>
+              <a:schemeClr val="tx1"/>
+            </a:solidFill>
+          </a:ln>
+        </p:spPr>
+        <p:style>
+          <a:lnRef idx="2">
+            <a:schemeClr val="accent1">
+              <a:shade val="15000"/>
+            </a:schemeClr>
+          </a:lnRef>
+          <a:fillRef idx="1">
+            <a:schemeClr val="accent1"/>
+          </a:fillRef>
+          <a:effectRef idx="0">
+            <a:schemeClr val="accent1"/>
+          </a:effectRef>
+          <a:fontRef idx="minor">
+            <a:schemeClr val="lt1"/>
+          </a:fontRef>
+        </p:style>
+        <p:txBody>
+          <a:bodyPr rtlCol="0" anchor="ctr"/>
+          <a:lstStyle/>
+          <a:p>
+            <a:pPr algn="ctr"/>
+            <a:r>
+              <a:rPr lang="ko-KR" altLang="en-US" dirty="0">
+                <a:solidFill>
+                  <a:sysClr val="windowText" lastClr="000000"/>
+                </a:solidFill>
+              </a:rPr>
+              <a:t>기억 회복률 변화 내용 삭제</a:t>
+            </a:r>
+          </a:p>
+        </p:txBody>
+      </p:sp>
+      <p:cxnSp>
+        <p:nvCxnSpPr>
+          <p:cNvPr id="47" name="직선 화살표 연결선 46">
+            <a:extLst>
+              <a:ext uri="{FF2B5EF4-FFF2-40B4-BE49-F238E27FC236}">
+                <a16:creationId xmlns:a16="http://schemas.microsoft.com/office/drawing/2014/main" id="{65404509-C57E-01EC-765E-A7B5E93F3A19}"/>
+              </a:ext>
+            </a:extLst>
+          </p:cNvPr>
+          <p:cNvCxnSpPr>
+            <a:cxnSpLocks/>
+          </p:cNvCxnSpPr>
+          <p:nvPr/>
+        </p:nvCxnSpPr>
+        <p:spPr>
+          <a:xfrm>
+            <a:off x="2334740" y="5416696"/>
+            <a:ext cx="0" cy="715518"/>
+          </a:xfrm>
+          <a:prstGeom prst="straightConnector1">
+            <a:avLst/>
+          </a:prstGeom>
+          <a:ln>
+            <a:solidFill>
+              <a:schemeClr val="tx1"/>
+            </a:solidFill>
+            <a:tailEnd type="triangle"/>
+          </a:ln>
+        </p:spPr>
+        <p:style>
+          <a:lnRef idx="1">
+            <a:schemeClr val="accent1"/>
+          </a:lnRef>
+          <a:fillRef idx="0">
+            <a:schemeClr val="accent1"/>
+          </a:fillRef>
+          <a:effectRef idx="0">
+            <a:schemeClr val="accent1"/>
+          </a:effectRef>
+          <a:fontRef idx="minor">
+            <a:schemeClr val="tx1"/>
+          </a:fontRef>
+        </p:style>
+      </p:cxnSp>
+      <p:sp>
+        <p:nvSpPr>
+          <p:cNvPr id="48" name="직사각형 47">
+            <a:extLst>
+              <a:ext uri="{FF2B5EF4-FFF2-40B4-BE49-F238E27FC236}">
+                <a16:creationId xmlns:a16="http://schemas.microsoft.com/office/drawing/2014/main" id="{BF24D7F5-359E-C8D2-E27D-F0C70CC2BF53}"/>
+              </a:ext>
+            </a:extLst>
+          </p:cNvPr>
+          <p:cNvSpPr/>
+          <p:nvPr/>
+        </p:nvSpPr>
+        <p:spPr>
+          <a:xfrm>
+            <a:off x="1199700" y="6132215"/>
+            <a:ext cx="2215694" cy="593310"/>
+          </a:xfrm>
+          <a:prstGeom prst="rect">
+            <a:avLst/>
+          </a:prstGeom>
+          <a:noFill/>
+          <a:ln>
+            <a:solidFill>
+              <a:schemeClr val="tx1"/>
+            </a:solidFill>
+          </a:ln>
+        </p:spPr>
+        <p:style>
+          <a:lnRef idx="2">
+            <a:schemeClr val="accent1">
+              <a:shade val="15000"/>
+            </a:schemeClr>
+          </a:lnRef>
+          <a:fillRef idx="1">
+            <a:schemeClr val="accent1"/>
+          </a:fillRef>
+          <a:effectRef idx="0">
+            <a:schemeClr val="accent1"/>
+          </a:effectRef>
+          <a:fontRef idx="minor">
+            <a:schemeClr val="lt1"/>
+          </a:fontRef>
+        </p:style>
+        <p:txBody>
+          <a:bodyPr rtlCol="0" anchor="ctr"/>
+          <a:lstStyle/>
+          <a:p>
+            <a:pPr algn="ctr"/>
+            <a:r>
+              <a:rPr lang="ko-KR" altLang="en-US" dirty="0">
+                <a:solidFill>
+                  <a:sysClr val="windowText" lastClr="000000"/>
+                </a:solidFill>
+              </a:rPr>
+              <a:t>스테이지 클리어</a:t>
+            </a:r>
+          </a:p>
+        </p:txBody>
+      </p:sp>
+      <p:sp>
+        <p:nvSpPr>
+          <p:cNvPr id="50" name="직사각형 49">
+            <a:extLst>
+              <a:ext uri="{FF2B5EF4-FFF2-40B4-BE49-F238E27FC236}">
+                <a16:creationId xmlns:a16="http://schemas.microsoft.com/office/drawing/2014/main" id="{6B65522B-6BDC-2D91-75B9-B71F7987A4D8}"/>
+              </a:ext>
+            </a:extLst>
+          </p:cNvPr>
+          <p:cNvSpPr/>
+          <p:nvPr/>
+        </p:nvSpPr>
+        <p:spPr>
+          <a:xfrm>
+            <a:off x="3585280" y="6011340"/>
+            <a:ext cx="7112311" cy="738909"/>
+          </a:xfrm>
+          <a:prstGeom prst="rect">
+            <a:avLst/>
+          </a:prstGeom>
+          <a:noFill/>
+          <a:ln>
+            <a:noFill/>
+          </a:ln>
+        </p:spPr>
+        <p:style>
+          <a:lnRef idx="2">
+            <a:schemeClr val="accent1">
+              <a:shade val="15000"/>
+            </a:schemeClr>
+          </a:lnRef>
+          <a:fillRef idx="1">
+            <a:schemeClr val="accent1"/>
+          </a:fillRef>
+          <a:effectRef idx="0">
+            <a:schemeClr val="accent1"/>
+          </a:effectRef>
+          <a:fontRef idx="minor">
+            <a:schemeClr val="lt1"/>
+          </a:fontRef>
+        </p:style>
+        <p:txBody>
+          <a:bodyPr rtlCol="0" anchor="ctr"/>
+          <a:lstStyle/>
+          <a:p>
+            <a:pPr algn="ctr"/>
+            <a:r>
+              <a:rPr lang="ko-KR" altLang="en-US" dirty="0">
+                <a:solidFill>
+                  <a:sysClr val="windowText" lastClr="000000"/>
+                </a:solidFill>
+              </a:rPr>
+              <a:t>기억 회복률 최종값 저장</a:t>
+            </a:r>
+            <a:r>
+              <a:rPr lang="en-US" altLang="ko-KR" dirty="0">
+                <a:solidFill>
+                  <a:sysClr val="windowText" lastClr="000000"/>
+                </a:solidFill>
+              </a:rPr>
+              <a:t>, </a:t>
+            </a:r>
+            <a:r>
+              <a:rPr lang="ko-KR" altLang="en-US" dirty="0">
+                <a:solidFill>
+                  <a:sysClr val="windowText" lastClr="000000"/>
+                </a:solidFill>
+              </a:rPr>
+              <a:t>스테이지 클리어 정보 저장</a:t>
+            </a:r>
+            <a:r>
+              <a:rPr lang="en-US" altLang="ko-KR" dirty="0">
+                <a:solidFill>
+                  <a:sysClr val="windowText" lastClr="000000"/>
+                </a:solidFill>
+              </a:rPr>
+              <a:t>  </a:t>
+            </a:r>
+            <a:endParaRPr lang="ko-KR" altLang="en-US" dirty="0">
+              <a:solidFill>
+                <a:sysClr val="windowText" lastClr="000000"/>
+              </a:solidFill>
+            </a:endParaRPr>
+          </a:p>
+        </p:txBody>
+      </p:sp>
+      <p:sp>
+        <p:nvSpPr>
+          <p:cNvPr id="51" name="직사각형 50">
+            <a:extLst>
+              <a:ext uri="{FF2B5EF4-FFF2-40B4-BE49-F238E27FC236}">
+                <a16:creationId xmlns:a16="http://schemas.microsoft.com/office/drawing/2014/main" id="{C6432274-3FBA-0EB3-5166-EC2AE2103D2C}"/>
+              </a:ext>
+            </a:extLst>
+          </p:cNvPr>
+          <p:cNvSpPr/>
+          <p:nvPr/>
+        </p:nvSpPr>
+        <p:spPr>
+          <a:xfrm>
+            <a:off x="6860082" y="4011011"/>
+            <a:ext cx="4220773" cy="738909"/>
+          </a:xfrm>
+          <a:prstGeom prst="rect">
+            <a:avLst/>
+          </a:prstGeom>
+          <a:noFill/>
+          <a:ln>
+            <a:noFill/>
+          </a:ln>
+        </p:spPr>
+        <p:style>
+          <a:lnRef idx="2">
+            <a:schemeClr val="accent1">
+              <a:shade val="15000"/>
+            </a:schemeClr>
+          </a:lnRef>
+          <a:fillRef idx="1">
+            <a:schemeClr val="accent1"/>
+          </a:fillRef>
+          <a:effectRef idx="0">
+            <a:schemeClr val="accent1"/>
+          </a:effectRef>
+          <a:fontRef idx="minor">
+            <a:schemeClr val="lt1"/>
+          </a:fontRef>
+        </p:style>
+        <p:txBody>
+          <a:bodyPr rtlCol="0" anchor="ctr"/>
+          <a:lstStyle/>
+          <a:p>
+            <a:pPr algn="ctr"/>
+            <a:r>
+              <a:rPr lang="ko-KR" altLang="en-US" dirty="0">
+                <a:solidFill>
+                  <a:sysClr val="windowText" lastClr="000000"/>
+                </a:solidFill>
+              </a:rPr>
+              <a:t>스테이지 시작 전 정보값으로 돌아감</a:t>
+            </a:r>
+          </a:p>
+        </p:txBody>
+      </p:sp>
+    </p:spTree>
+    <p:extLst>
+      <p:ext uri="{BB962C8B-B14F-4D97-AF65-F5344CB8AC3E}">
+        <p14:creationId xmlns:p14="http://schemas.microsoft.com/office/powerpoint/2010/main" val="3344066586"/>
+      </p:ext>
+    </p:extLst>
+  </p:cSld>
+  <p:clrMapOvr>
+    <a:masterClrMapping/>
+  </p:clrMapOvr>
+</p:sld>
+</file>
+
+<file path=ppt/slides/slide4.xml><?xml version="1.0" encoding="utf-8"?>
+<p:sld xmlns:a="http://schemas.openxmlformats.org/drawingml/2006/main" xmlns:r="http://schemas.openxmlformats.org/officeDocument/2006/relationships" xmlns:p="http://schemas.openxmlformats.org/presentationml/2006/main">
+  <p:cSld>
+    <p:spTree>
+      <p:nvGrpSpPr>
+        <p:cNvPr id="1" name="">
+          <a:extLst>
+            <a:ext uri="{FF2B5EF4-FFF2-40B4-BE49-F238E27FC236}">
               <a16:creationId xmlns:a16="http://schemas.microsoft.com/office/drawing/2014/main" id="{6DD9DA73-91BE-CBC0-8B1E-8979D88B6064}"/>
             </a:ext>
           </a:extLst>
@@ -4827,7 +5923,7 @@
           <a:lstStyle/>
           <a:p>
             <a:r>
-              <a:rPr lang="en-US" altLang="ko-KR"/>
+              <a:rPr lang="en-US" altLang="ko-KR" dirty="0"/>
               <a:t>HP </a:t>
             </a:r>
             <a:r>
@@ -5090,7 +6186,7 @@
 </p:sld>
 </file>
 
-<file path=ppt/slides/slide4.xml><?xml version="1.0" encoding="utf-8"?>
+<file path=ppt/slides/slide5.xml><?xml version="1.0" encoding="utf-8"?>
 <p:sld xmlns:a="http://schemas.openxmlformats.org/drawingml/2006/main" xmlns:r="http://schemas.openxmlformats.org/officeDocument/2006/relationships" xmlns:p="http://schemas.openxmlformats.org/presentationml/2006/main">
   <p:cSld>
     <p:spTree>
@@ -5381,7 +6477,7 @@
 </p:sld>
 </file>
 
-<file path=ppt/slides/slide5.xml><?xml version="1.0" encoding="utf-8"?>
+<file path=ppt/slides/slide6.xml><?xml version="1.0" encoding="utf-8"?>
 <p:sld xmlns:a="http://schemas.openxmlformats.org/drawingml/2006/main" xmlns:r="http://schemas.openxmlformats.org/officeDocument/2006/relationships" xmlns:p="http://schemas.openxmlformats.org/presentationml/2006/main">
   <p:cSld>
     <p:spTree>
@@ -5920,7 +7016,7 @@
 </p:sld>
 </file>
 
-<file path=ppt/slides/slide6.xml><?xml version="1.0" encoding="utf-8"?>
+<file path=ppt/slides/slide7.xml><?xml version="1.0" encoding="utf-8"?>
 <p:sld xmlns:a="http://schemas.openxmlformats.org/drawingml/2006/main" xmlns:r="http://schemas.openxmlformats.org/officeDocument/2006/relationships" xmlns:p="http://schemas.openxmlformats.org/presentationml/2006/main">
   <p:cSld>
     <p:spTree>

--- a/Documents/Trip of memories SYSTEM Flow Chart.pptx
+++ b/Documents/Trip of memories SYSTEM Flow Chart.pptx
@@ -12,6 +12,7 @@
     <p:sldId id="259" r:id="rId6"/>
     <p:sldId id="260" r:id="rId7"/>
     <p:sldId id="261" r:id="rId8"/>
+    <p:sldId id="263" r:id="rId9"/>
   </p:sldIdLst>
   <p:sldSz cx="12192000" cy="6858000"/>
   <p:notesSz cx="6858000" cy="9144000"/>
@@ -7237,6 +7238,357 @@
 </p:sld>
 </file>
 
+<file path=ppt/slides/slide8.xml><?xml version="1.0" encoding="utf-8"?>
+<p:sld xmlns:a="http://schemas.openxmlformats.org/drawingml/2006/main" xmlns:r="http://schemas.openxmlformats.org/officeDocument/2006/relationships" xmlns:p="http://schemas.openxmlformats.org/presentationml/2006/main">
+  <p:cSld>
+    <p:spTree>
+      <p:nvGrpSpPr>
+        <p:cNvPr id="1" name="">
+          <a:extLst>
+            <a:ext uri="{FF2B5EF4-FFF2-40B4-BE49-F238E27FC236}">
+              <a16:creationId xmlns:a16="http://schemas.microsoft.com/office/drawing/2014/main" id="{544AC325-0FB2-E09E-9F0C-A1D56070128E}"/>
+            </a:ext>
+          </a:extLst>
+        </p:cNvPr>
+        <p:cNvGrpSpPr/>
+        <p:nvPr/>
+      </p:nvGrpSpPr>
+      <p:grpSpPr>
+        <a:xfrm>
+          <a:off x="0" y="0"/>
+          <a:ext cx="0" cy="0"/>
+          <a:chOff x="0" y="0"/>
+          <a:chExt cx="0" cy="0"/>
+        </a:xfrm>
+      </p:grpSpPr>
+      <p:sp>
+        <p:nvSpPr>
+          <p:cNvPr id="15" name="타원 14">
+            <a:extLst>
+              <a:ext uri="{FF2B5EF4-FFF2-40B4-BE49-F238E27FC236}">
+                <a16:creationId xmlns:a16="http://schemas.microsoft.com/office/drawing/2014/main" id="{9BF9FF08-E5B7-8114-70E6-5E735621327D}"/>
+              </a:ext>
+            </a:extLst>
+          </p:cNvPr>
+          <p:cNvSpPr/>
+          <p:nvPr/>
+        </p:nvSpPr>
+        <p:spPr>
+          <a:xfrm>
+            <a:off x="3426781" y="1402672"/>
+            <a:ext cx="5202314" cy="4829452"/>
+          </a:xfrm>
+          <a:prstGeom prst="ellipse">
+            <a:avLst/>
+          </a:prstGeom>
+          <a:solidFill>
+            <a:schemeClr val="accent5">
+              <a:lumMod val="20000"/>
+              <a:lumOff val="80000"/>
+            </a:schemeClr>
+          </a:solidFill>
+          <a:ln>
+            <a:noFill/>
+          </a:ln>
+        </p:spPr>
+        <p:style>
+          <a:lnRef idx="2">
+            <a:schemeClr val="accent1">
+              <a:shade val="15000"/>
+            </a:schemeClr>
+          </a:lnRef>
+          <a:fillRef idx="1">
+            <a:schemeClr val="accent1"/>
+          </a:fillRef>
+          <a:effectRef idx="0">
+            <a:schemeClr val="accent1"/>
+          </a:effectRef>
+          <a:fontRef idx="minor">
+            <a:schemeClr val="lt1"/>
+          </a:fontRef>
+        </p:style>
+        <p:txBody>
+          <a:bodyPr rtlCol="0" anchor="ctr"/>
+          <a:lstStyle/>
+          <a:p>
+            <a:pPr algn="ctr"/>
+            <a:endParaRPr lang="ko-KR" altLang="en-US"/>
+          </a:p>
+        </p:txBody>
+      </p:sp>
+      <p:sp>
+        <p:nvSpPr>
+          <p:cNvPr id="16" name="타원 15">
+            <a:extLst>
+              <a:ext uri="{FF2B5EF4-FFF2-40B4-BE49-F238E27FC236}">
+                <a16:creationId xmlns:a16="http://schemas.microsoft.com/office/drawing/2014/main" id="{AE5AD986-ED3D-36B8-5D31-A9525F92B4F6}"/>
+              </a:ext>
+            </a:extLst>
+          </p:cNvPr>
+          <p:cNvSpPr/>
+          <p:nvPr/>
+        </p:nvSpPr>
+        <p:spPr>
+          <a:xfrm>
+            <a:off x="4199138" y="2050742"/>
+            <a:ext cx="3653900" cy="3542929"/>
+          </a:xfrm>
+          <a:prstGeom prst="ellipse">
+            <a:avLst/>
+          </a:prstGeom>
+          <a:solidFill>
+            <a:schemeClr val="accent4">
+              <a:lumMod val="40000"/>
+              <a:lumOff val="60000"/>
+            </a:schemeClr>
+          </a:solidFill>
+          <a:ln>
+            <a:noFill/>
+          </a:ln>
+        </p:spPr>
+        <p:style>
+          <a:lnRef idx="2">
+            <a:schemeClr val="accent1">
+              <a:shade val="15000"/>
+            </a:schemeClr>
+          </a:lnRef>
+          <a:fillRef idx="1">
+            <a:schemeClr val="accent1"/>
+          </a:fillRef>
+          <a:effectRef idx="0">
+            <a:schemeClr val="accent1"/>
+          </a:effectRef>
+          <a:fontRef idx="minor">
+            <a:schemeClr val="lt1"/>
+          </a:fontRef>
+        </p:style>
+        <p:txBody>
+          <a:bodyPr rtlCol="0" anchor="ctr"/>
+          <a:lstStyle/>
+          <a:p>
+            <a:pPr algn="ctr"/>
+            <a:endParaRPr lang="ko-KR" altLang="en-US"/>
+          </a:p>
+        </p:txBody>
+      </p:sp>
+      <p:sp>
+        <p:nvSpPr>
+          <p:cNvPr id="17" name="타원 16">
+            <a:extLst>
+              <a:ext uri="{FF2B5EF4-FFF2-40B4-BE49-F238E27FC236}">
+                <a16:creationId xmlns:a16="http://schemas.microsoft.com/office/drawing/2014/main" id="{14DC07E8-08D5-737C-3334-B0068223C69A}"/>
+              </a:ext>
+            </a:extLst>
+          </p:cNvPr>
+          <p:cNvSpPr/>
+          <p:nvPr/>
+        </p:nvSpPr>
+        <p:spPr>
+          <a:xfrm>
+            <a:off x="5778253" y="3578810"/>
+            <a:ext cx="523782" cy="477175"/>
+          </a:xfrm>
+          <a:prstGeom prst="ellipse">
+            <a:avLst/>
+          </a:prstGeom>
+          <a:solidFill>
+            <a:schemeClr val="accent2"/>
+          </a:solidFill>
+        </p:spPr>
+        <p:style>
+          <a:lnRef idx="2">
+            <a:schemeClr val="accent1">
+              <a:shade val="15000"/>
+            </a:schemeClr>
+          </a:lnRef>
+          <a:fillRef idx="1">
+            <a:schemeClr val="accent1"/>
+          </a:fillRef>
+          <a:effectRef idx="0">
+            <a:schemeClr val="accent1"/>
+          </a:effectRef>
+          <a:fontRef idx="minor">
+            <a:schemeClr val="lt1"/>
+          </a:fontRef>
+        </p:style>
+        <p:txBody>
+          <a:bodyPr rtlCol="0" anchor="ctr"/>
+          <a:lstStyle/>
+          <a:p>
+            <a:pPr algn="ctr"/>
+            <a:endParaRPr lang="ko-KR" altLang="en-US"/>
+          </a:p>
+        </p:txBody>
+      </p:sp>
+      <p:cxnSp>
+        <p:nvCxnSpPr>
+          <p:cNvPr id="19" name="직선 화살표 연결선 18">
+            <a:extLst>
+              <a:ext uri="{FF2B5EF4-FFF2-40B4-BE49-F238E27FC236}">
+                <a16:creationId xmlns:a16="http://schemas.microsoft.com/office/drawing/2014/main" id="{55867E7E-BBC4-DCA3-1044-EB98A60AFF97}"/>
+              </a:ext>
+            </a:extLst>
+          </p:cNvPr>
+          <p:cNvCxnSpPr>
+            <a:stCxn id="16" idx="2"/>
+          </p:cNvCxnSpPr>
+          <p:nvPr/>
+        </p:nvCxnSpPr>
+        <p:spPr>
+          <a:xfrm flipV="1">
+            <a:off x="4199138" y="3817398"/>
+            <a:ext cx="1500326" cy="4809"/>
+          </a:xfrm>
+          <a:prstGeom prst="straightConnector1">
+            <a:avLst/>
+          </a:prstGeom>
+          <a:ln>
+            <a:headEnd type="triangle"/>
+            <a:tailEnd type="triangle"/>
+          </a:ln>
+        </p:spPr>
+        <p:style>
+          <a:lnRef idx="1">
+            <a:schemeClr val="accent1"/>
+          </a:lnRef>
+          <a:fillRef idx="0">
+            <a:schemeClr val="accent1"/>
+          </a:fillRef>
+          <a:effectRef idx="0">
+            <a:schemeClr val="accent1"/>
+          </a:effectRef>
+          <a:fontRef idx="minor">
+            <a:schemeClr val="tx1"/>
+          </a:fontRef>
+        </p:style>
+      </p:cxnSp>
+      <p:sp>
+        <p:nvSpPr>
+          <p:cNvPr id="20" name="TextBox 19">
+            <a:extLst>
+              <a:ext uri="{FF2B5EF4-FFF2-40B4-BE49-F238E27FC236}">
+                <a16:creationId xmlns:a16="http://schemas.microsoft.com/office/drawing/2014/main" id="{9BAC9394-AAE2-A8F2-ADBB-0B383F24DC0E}"/>
+              </a:ext>
+            </a:extLst>
+          </p:cNvPr>
+          <p:cNvSpPr txBox="1"/>
+          <p:nvPr/>
+        </p:nvSpPr>
+        <p:spPr>
+          <a:xfrm>
+            <a:off x="4759136" y="3308697"/>
+            <a:ext cx="858982" cy="369332"/>
+          </a:xfrm>
+          <a:prstGeom prst="rect">
+            <a:avLst/>
+          </a:prstGeom>
+          <a:noFill/>
+        </p:spPr>
+        <p:txBody>
+          <a:bodyPr wrap="square" rtlCol="0">
+            <a:spAutoFit/>
+          </a:bodyPr>
+          <a:lstStyle/>
+          <a:p>
+            <a:r>
+              <a:rPr lang="en-US" altLang="ko-KR" dirty="0"/>
+              <a:t>3m</a:t>
+            </a:r>
+            <a:endParaRPr lang="ko-KR" altLang="en-US" dirty="0"/>
+          </a:p>
+        </p:txBody>
+      </p:sp>
+      <p:cxnSp>
+        <p:nvCxnSpPr>
+          <p:cNvPr id="21" name="직선 화살표 연결선 20">
+            <a:extLst>
+              <a:ext uri="{FF2B5EF4-FFF2-40B4-BE49-F238E27FC236}">
+                <a16:creationId xmlns:a16="http://schemas.microsoft.com/office/drawing/2014/main" id="{16172A88-7EF5-0A61-3D20-4B8C53C9B9B7}"/>
+              </a:ext>
+            </a:extLst>
+          </p:cNvPr>
+          <p:cNvCxnSpPr>
+            <a:cxnSpLocks/>
+          </p:cNvCxnSpPr>
+          <p:nvPr/>
+        </p:nvCxnSpPr>
+        <p:spPr>
+          <a:xfrm flipV="1">
+            <a:off x="3423081" y="3961576"/>
+            <a:ext cx="2275105" cy="33275"/>
+          </a:xfrm>
+          <a:prstGeom prst="straightConnector1">
+            <a:avLst/>
+          </a:prstGeom>
+          <a:ln>
+            <a:headEnd type="triangle"/>
+            <a:tailEnd type="triangle"/>
+          </a:ln>
+        </p:spPr>
+        <p:style>
+          <a:lnRef idx="1">
+            <a:schemeClr val="accent1"/>
+          </a:lnRef>
+          <a:fillRef idx="0">
+            <a:schemeClr val="accent1"/>
+          </a:fillRef>
+          <a:effectRef idx="0">
+            <a:schemeClr val="accent1"/>
+          </a:effectRef>
+          <a:fontRef idx="minor">
+            <a:schemeClr val="tx1"/>
+          </a:fontRef>
+        </p:style>
+      </p:cxnSp>
+      <p:sp>
+        <p:nvSpPr>
+          <p:cNvPr id="23" name="TextBox 22">
+            <a:extLst>
+              <a:ext uri="{FF2B5EF4-FFF2-40B4-BE49-F238E27FC236}">
+                <a16:creationId xmlns:a16="http://schemas.microsoft.com/office/drawing/2014/main" id="{5B127F30-8420-C0C9-7732-E328ED3CED92}"/>
+              </a:ext>
+            </a:extLst>
+          </p:cNvPr>
+          <p:cNvSpPr txBox="1"/>
+          <p:nvPr/>
+        </p:nvSpPr>
+        <p:spPr>
+          <a:xfrm>
+            <a:off x="4399388" y="4025923"/>
+            <a:ext cx="858982" cy="369332"/>
+          </a:xfrm>
+          <a:prstGeom prst="rect">
+            <a:avLst/>
+          </a:prstGeom>
+          <a:noFill/>
+        </p:spPr>
+        <p:txBody>
+          <a:bodyPr wrap="square" rtlCol="0">
+            <a:spAutoFit/>
+          </a:bodyPr>
+          <a:lstStyle/>
+          <a:p>
+            <a:r>
+              <a:rPr lang="en-US" altLang="ko-KR" dirty="0"/>
+              <a:t>5m</a:t>
+            </a:r>
+            <a:endParaRPr lang="ko-KR" altLang="en-US" dirty="0"/>
+          </a:p>
+        </p:txBody>
+      </p:sp>
+    </p:spTree>
+    <p:extLst>
+      <p:ext uri="{BB962C8B-B14F-4D97-AF65-F5344CB8AC3E}">
+        <p14:creationId xmlns:p14="http://schemas.microsoft.com/office/powerpoint/2010/main" val="1828213258"/>
+      </p:ext>
+    </p:extLst>
+  </p:cSld>
+  <p:clrMapOvr>
+    <a:masterClrMapping/>
+  </p:clrMapOvr>
+</p:sld>
+</file>
+
 <file path=ppt/theme/theme1.xml><?xml version="1.0" encoding="utf-8"?>
 <a:theme xmlns:a="http://schemas.openxmlformats.org/drawingml/2006/main" name="Office 테마">
   <a:themeElements>
